--- a/广东省智慧交通产业图谱_2026.pptx
+++ b/广东省智慧交通产业图谱_2026.pptx
@@ -3333,7 +3333,7 @@
               </a:defRPr>
             </a:pPr>
             <a:r>
-              <a:t>收录 397 家企业/机构  |  上游 137 · 中游 188 · 下游 72</a:t>
+              <a:t>收录 417 家企业/机构  |  上游 156 · 中游 190 · 下游 71</a:t>
             </a:r>
           </a:p>
         </p:txBody>
@@ -4678,7 +4678,7 @@
               </a:defRPr>
             </a:pPr>
             <a:r>
-              <a:t>共 36 家企业/机构涉及此场景</a:t>
+              <a:t>共 45 家企业/机构涉及此场景</a:t>
             </a:r>
           </a:p>
         </p:txBody>
@@ -4730,7 +4730,7 @@
               </a:defRPr>
             </a:pPr>
             <a:r>
-              <a:t>🔧 上游技术（24家）</a:t>
+              <a:t>🔧 上游技术（27家）</a:t>
             </a:r>
           </a:p>
         </p:txBody>
@@ -5395,7 +5395,7 @@
               </a:defRPr>
             </a:pPr>
             <a:r>
-              <a:t>...及其他 6 家</a:t>
+              <a:t>...及其他 9 家</a:t>
             </a:r>
           </a:p>
         </p:txBody>
@@ -5447,7 +5447,7 @@
               </a:defRPr>
             </a:pPr>
             <a:r>
-              <a:t>⚙️ 中游集成（8家）</a:t>
+              <a:t>⚙️ 中游集成（13家）</a:t>
             </a:r>
           </a:p>
         </p:txBody>
@@ -5477,6 +5477,41 @@
             <a:pPr algn="l">
               <a:defRPr sz="750" b="0">
                 <a:solidFill>
+                  <a:srgbClr val="D97706"/>
+                </a:solidFill>
+              </a:defRPr>
+            </a:pPr>
+            <a:r>
+              <a:t>[国] 广州市城市规划勘测设计研究院有限公司</a:t>
+            </a:r>
+          </a:p>
+        </p:txBody>
+      </p:sp>
+      <p:sp>
+        <p:nvSpPr>
+          <p:cNvPr id="26" name="TextBox 25"/>
+          <p:cNvSpPr txBox="1"/>
+          <p:nvPr/>
+        </p:nvSpPr>
+        <p:spPr>
+          <a:xfrm>
+            <a:off x="4297680" y="2121408"/>
+            <a:ext cx="3474720" cy="201168"/>
+          </a:xfrm>
+          <a:prstGeom prst="rect">
+            <a:avLst/>
+          </a:prstGeom>
+          <a:noFill/>
+        </p:spPr>
+        <p:txBody>
+          <a:bodyPr wrap="square">
+            <a:spAutoFit/>
+          </a:bodyPr>
+          <a:lstStyle/>
+          <a:p>
+            <a:pPr algn="l">
+              <a:defRPr sz="750" b="0">
+                <a:solidFill>
                   <a:srgbClr val="0891B2"/>
                 </a:solidFill>
               </a:defRPr>
@@ -5489,13 +5524,13 @@
       </p:sp>
       <p:sp>
         <p:nvSpPr>
-          <p:cNvPr id="26" name="TextBox 25"/>
-          <p:cNvSpPr txBox="1"/>
-          <p:nvPr/>
-        </p:nvSpPr>
-        <p:spPr>
-          <a:xfrm>
-            <a:off x="4297680" y="2121408"/>
+          <p:cNvPr id="27" name="TextBox 26"/>
+          <p:cNvSpPr txBox="1"/>
+          <p:nvPr/>
+        </p:nvSpPr>
+        <p:spPr>
+          <a:xfrm>
+            <a:off x="4297680" y="2322576"/>
             <a:ext cx="3474720" cy="201168"/>
           </a:xfrm>
           <a:prstGeom prst="rect">
@@ -5524,13 +5559,13 @@
       </p:sp>
       <p:sp>
         <p:nvSpPr>
-          <p:cNvPr id="27" name="TextBox 26"/>
-          <p:cNvSpPr txBox="1"/>
-          <p:nvPr/>
-        </p:nvSpPr>
-        <p:spPr>
-          <a:xfrm>
-            <a:off x="4297680" y="2322576"/>
+          <p:cNvPr id="28" name="TextBox 27"/>
+          <p:cNvSpPr txBox="1"/>
+          <p:nvPr/>
+        </p:nvSpPr>
+        <p:spPr>
+          <a:xfrm>
+            <a:off x="4297680" y="2523744"/>
             <a:ext cx="3474720" cy="201168"/>
           </a:xfrm>
           <a:prstGeom prst="rect">
@@ -5552,6 +5587,41 @@
               </a:defRPr>
             </a:pPr>
             <a:r>
+              <a:t>[民] 广东振业优控科技股份有限公司</a:t>
+            </a:r>
+          </a:p>
+        </p:txBody>
+      </p:sp>
+      <p:sp>
+        <p:nvSpPr>
+          <p:cNvPr id="29" name="TextBox 28"/>
+          <p:cNvSpPr txBox="1"/>
+          <p:nvPr/>
+        </p:nvSpPr>
+        <p:spPr>
+          <a:xfrm>
+            <a:off x="4297680" y="2724912"/>
+            <a:ext cx="3474720" cy="201168"/>
+          </a:xfrm>
+          <a:prstGeom prst="rect">
+            <a:avLst/>
+          </a:prstGeom>
+          <a:noFill/>
+        </p:spPr>
+        <p:txBody>
+          <a:bodyPr wrap="square">
+            <a:spAutoFit/>
+          </a:bodyPr>
+          <a:lstStyle/>
+          <a:p>
+            <a:pPr algn="l">
+              <a:defRPr sz="750" b="0">
+                <a:solidFill>
+                  <a:srgbClr val="0891B2"/>
+                </a:solidFill>
+              </a:defRPr>
+            </a:pPr>
+            <a:r>
               <a:t>[民] 广东智飞航空技术服务有限公司</a:t>
             </a:r>
           </a:p>
@@ -5559,13 +5629,13 @@
       </p:sp>
       <p:sp>
         <p:nvSpPr>
-          <p:cNvPr id="28" name="TextBox 27"/>
-          <p:cNvSpPr txBox="1"/>
-          <p:nvPr/>
-        </p:nvSpPr>
-        <p:spPr>
-          <a:xfrm>
-            <a:off x="4297680" y="2523744"/>
+          <p:cNvPr id="30" name="TextBox 29"/>
+          <p:cNvSpPr txBox="1"/>
+          <p:nvPr/>
+        </p:nvSpPr>
+        <p:spPr>
+          <a:xfrm>
+            <a:off x="4297680" y="2926080"/>
             <a:ext cx="3474720" cy="201168"/>
           </a:xfrm>
           <a:prstGeom prst="rect">
@@ -5594,13 +5664,13 @@
       </p:sp>
       <p:sp>
         <p:nvSpPr>
-          <p:cNvPr id="29" name="TextBox 28"/>
-          <p:cNvSpPr txBox="1"/>
-          <p:nvPr/>
-        </p:nvSpPr>
-        <p:spPr>
-          <a:xfrm>
-            <a:off x="4297680" y="2724912"/>
+          <p:cNvPr id="31" name="TextBox 30"/>
+          <p:cNvSpPr txBox="1"/>
+          <p:nvPr/>
+        </p:nvSpPr>
+        <p:spPr>
+          <a:xfrm>
+            <a:off x="4297680" y="3127248"/>
             <a:ext cx="3474720" cy="201168"/>
           </a:xfrm>
           <a:prstGeom prst="rect">
@@ -5629,13 +5699,13 @@
       </p:sp>
       <p:sp>
         <p:nvSpPr>
-          <p:cNvPr id="30" name="TextBox 29"/>
-          <p:cNvSpPr txBox="1"/>
-          <p:nvPr/>
-        </p:nvSpPr>
-        <p:spPr>
-          <a:xfrm>
-            <a:off x="4297680" y="2926080"/>
+          <p:cNvPr id="32" name="TextBox 31"/>
+          <p:cNvSpPr txBox="1"/>
+          <p:nvPr/>
+        </p:nvSpPr>
+        <p:spPr>
+          <a:xfrm>
+            <a:off x="4297680" y="3328416"/>
             <a:ext cx="3474720" cy="201168"/>
           </a:xfrm>
           <a:prstGeom prst="rect">
@@ -5664,13 +5734,13 @@
       </p:sp>
       <p:sp>
         <p:nvSpPr>
-          <p:cNvPr id="31" name="TextBox 30"/>
-          <p:cNvSpPr txBox="1"/>
-          <p:nvPr/>
-        </p:nvSpPr>
-        <p:spPr>
-          <a:xfrm>
-            <a:off x="4297680" y="3127248"/>
+          <p:cNvPr id="33" name="TextBox 32"/>
+          <p:cNvSpPr txBox="1"/>
+          <p:nvPr/>
+        </p:nvSpPr>
+        <p:spPr>
+          <a:xfrm>
+            <a:off x="4297680" y="3529584"/>
             <a:ext cx="3474720" cy="201168"/>
           </a:xfrm>
           <a:prstGeom prst="rect">
@@ -5692,6 +5762,41 @@
               </a:defRPr>
             </a:pPr>
             <a:r>
+              <a:t>[民] 广州市迈得科技有限公司</a:t>
+            </a:r>
+          </a:p>
+        </p:txBody>
+      </p:sp>
+      <p:sp>
+        <p:nvSpPr>
+          <p:cNvPr id="34" name="TextBox 33"/>
+          <p:cNvSpPr txBox="1"/>
+          <p:nvPr/>
+        </p:nvSpPr>
+        <p:spPr>
+          <a:xfrm>
+            <a:off x="4297680" y="3730752"/>
+            <a:ext cx="3474720" cy="201168"/>
+          </a:xfrm>
+          <a:prstGeom prst="rect">
+            <a:avLst/>
+          </a:prstGeom>
+          <a:noFill/>
+        </p:spPr>
+        <p:txBody>
+          <a:bodyPr wrap="square">
+            <a:spAutoFit/>
+          </a:bodyPr>
+          <a:lstStyle/>
+          <a:p>
+            <a:pPr algn="l">
+              <a:defRPr sz="750" b="0">
+                <a:solidFill>
+                  <a:srgbClr val="0891B2"/>
+                </a:solidFill>
+              </a:defRPr>
+            </a:pPr>
+            <a:r>
               <a:t>[民] 广州市鑫广飞信息科技有限公司</a:t>
             </a:r>
           </a:p>
@@ -5699,13 +5804,13 @@
       </p:sp>
       <p:sp>
         <p:nvSpPr>
-          <p:cNvPr id="32" name="TextBox 31"/>
-          <p:cNvSpPr txBox="1"/>
-          <p:nvPr/>
-        </p:nvSpPr>
-        <p:spPr>
-          <a:xfrm>
-            <a:off x="4297680" y="3328416"/>
+          <p:cNvPr id="35" name="TextBox 34"/>
+          <p:cNvSpPr txBox="1"/>
+          <p:nvPr/>
+        </p:nvSpPr>
+        <p:spPr>
+          <a:xfrm>
+            <a:off x="4297680" y="3931920"/>
             <a:ext cx="3474720" cy="201168"/>
           </a:xfrm>
           <a:prstGeom prst="rect">
@@ -5734,7 +5839,77 @@
       </p:sp>
       <p:sp>
         <p:nvSpPr>
-          <p:cNvPr id="33" name="Rectangle 32"/>
+          <p:cNvPr id="36" name="TextBox 35"/>
+          <p:cNvSpPr txBox="1"/>
+          <p:nvPr/>
+        </p:nvSpPr>
+        <p:spPr>
+          <a:xfrm>
+            <a:off x="4297680" y="4133088"/>
+            <a:ext cx="3474720" cy="201168"/>
+          </a:xfrm>
+          <a:prstGeom prst="rect">
+            <a:avLst/>
+          </a:prstGeom>
+          <a:noFill/>
+        </p:spPr>
+        <p:txBody>
+          <a:bodyPr wrap="square">
+            <a:spAutoFit/>
+          </a:bodyPr>
+          <a:lstStyle/>
+          <a:p>
+            <a:pPr algn="l">
+              <a:defRPr sz="750" b="0">
+                <a:solidFill>
+                  <a:srgbClr val="0891B2"/>
+                </a:solidFill>
+              </a:defRPr>
+            </a:pPr>
+            <a:r>
+              <a:t>[民] 广州智臣信息科技有限公司</a:t>
+            </a:r>
+          </a:p>
+        </p:txBody>
+      </p:sp>
+      <p:sp>
+        <p:nvSpPr>
+          <p:cNvPr id="37" name="TextBox 36"/>
+          <p:cNvSpPr txBox="1"/>
+          <p:nvPr/>
+        </p:nvSpPr>
+        <p:spPr>
+          <a:xfrm>
+            <a:off x="4297680" y="4334256"/>
+            <a:ext cx="3474720" cy="201168"/>
+          </a:xfrm>
+          <a:prstGeom prst="rect">
+            <a:avLst/>
+          </a:prstGeom>
+          <a:noFill/>
+        </p:spPr>
+        <p:txBody>
+          <a:bodyPr wrap="square">
+            <a:spAutoFit/>
+          </a:bodyPr>
+          <a:lstStyle/>
+          <a:p>
+            <a:pPr algn="l">
+              <a:defRPr sz="750" b="0">
+                <a:solidFill>
+                  <a:srgbClr val="0891B2"/>
+                </a:solidFill>
+              </a:defRPr>
+            </a:pPr>
+            <a:r>
+              <a:t>[民] 视云融聚（广州）科技有限公司</a:t>
+            </a:r>
+          </a:p>
+        </p:txBody>
+      </p:sp>
+      <p:sp>
+        <p:nvSpPr>
+          <p:cNvPr id="38" name="Rectangle 37"/>
           <p:cNvSpPr/>
           <p:nvPr/>
         </p:nvSpPr>
@@ -5779,14 +5954,14 @@
               </a:defRPr>
             </a:pPr>
             <a:r>
-              <a:t>📱 下游应用（4家）</a:t>
-            </a:r>
-          </a:p>
-        </p:txBody>
-      </p:sp>
-      <p:sp>
-        <p:nvSpPr>
-          <p:cNvPr id="34" name="TextBox 33"/>
+              <a:t>📱 下游应用（5家）</a:t>
+            </a:r>
+          </a:p>
+        </p:txBody>
+      </p:sp>
+      <p:sp>
+        <p:nvSpPr>
+          <p:cNvPr id="39" name="TextBox 38"/>
           <p:cNvSpPr txBox="1"/>
           <p:nvPr/>
         </p:nvSpPr>
@@ -5814,6 +5989,41 @@
               </a:defRPr>
             </a:pPr>
             <a:r>
+              <a:t>[国] 广州中交通信有限公司</a:t>
+            </a:r>
+          </a:p>
+        </p:txBody>
+      </p:sp>
+      <p:sp>
+        <p:nvSpPr>
+          <p:cNvPr id="40" name="TextBox 39"/>
+          <p:cNvSpPr txBox="1"/>
+          <p:nvPr/>
+        </p:nvSpPr>
+        <p:spPr>
+          <a:xfrm>
+            <a:off x="8138160" y="2121408"/>
+            <a:ext cx="3474720" cy="201168"/>
+          </a:xfrm>
+          <a:prstGeom prst="rect">
+            <a:avLst/>
+          </a:prstGeom>
+          <a:noFill/>
+        </p:spPr>
+        <p:txBody>
+          <a:bodyPr wrap="square">
+            <a:spAutoFit/>
+          </a:bodyPr>
+          <a:lstStyle/>
+          <a:p>
+            <a:pPr algn="l">
+              <a:defRPr sz="750" b="0">
+                <a:solidFill>
+                  <a:srgbClr val="D97706"/>
+                </a:solidFill>
+              </a:defRPr>
+            </a:pPr>
+            <a:r>
               <a:t>[国] 广州白云国际机场空港快线运输有限公司</a:t>
             </a:r>
           </a:p>
@@ -5821,13 +6031,13 @@
       </p:sp>
       <p:sp>
         <p:nvSpPr>
-          <p:cNvPr id="35" name="TextBox 34"/>
-          <p:cNvSpPr txBox="1"/>
-          <p:nvPr/>
-        </p:nvSpPr>
-        <p:spPr>
-          <a:xfrm>
-            <a:off x="8138160" y="2121408"/>
+          <p:cNvPr id="41" name="TextBox 40"/>
+          <p:cNvSpPr txBox="1"/>
+          <p:nvPr/>
+        </p:nvSpPr>
+        <p:spPr>
+          <a:xfrm>
+            <a:off x="8138160" y="2322576"/>
             <a:ext cx="3474720" cy="201168"/>
           </a:xfrm>
           <a:prstGeom prst="rect">
@@ -5856,13 +6066,13 @@
       </p:sp>
       <p:sp>
         <p:nvSpPr>
-          <p:cNvPr id="36" name="TextBox 35"/>
-          <p:cNvSpPr txBox="1"/>
-          <p:nvPr/>
-        </p:nvSpPr>
-        <p:spPr>
-          <a:xfrm>
-            <a:off x="8138160" y="2322576"/>
+          <p:cNvPr id="42" name="TextBox 41"/>
+          <p:cNvSpPr txBox="1"/>
+          <p:nvPr/>
+        </p:nvSpPr>
+        <p:spPr>
+          <a:xfrm>
+            <a:off x="8138160" y="2523744"/>
             <a:ext cx="3474720" cy="201168"/>
           </a:xfrm>
           <a:prstGeom prst="rect">
@@ -5891,13 +6101,13 @@
       </p:sp>
       <p:sp>
         <p:nvSpPr>
-          <p:cNvPr id="37" name="TextBox 36"/>
-          <p:cNvSpPr txBox="1"/>
-          <p:nvPr/>
-        </p:nvSpPr>
-        <p:spPr>
-          <a:xfrm>
-            <a:off x="8138160" y="2523744"/>
+          <p:cNvPr id="43" name="TextBox 42"/>
+          <p:cNvSpPr txBox="1"/>
+          <p:nvPr/>
+        </p:nvSpPr>
+        <p:spPr>
+          <a:xfrm>
+            <a:off x="8138160" y="2724912"/>
             <a:ext cx="3474720" cy="201168"/>
           </a:xfrm>
           <a:prstGeom prst="rect">
@@ -6032,7 +6242,7 @@
               </a:defRPr>
             </a:pPr>
             <a:r>
-              <a:t>共 20 家企业/机构涉及此场景</a:t>
+              <a:t>共 22 家企业/机构涉及此场景</a:t>
             </a:r>
           </a:p>
         </p:txBody>
@@ -6084,7 +6294,7 @@
               </a:defRPr>
             </a:pPr>
             <a:r>
-              <a:t>🔧 上游技术（3家）</a:t>
+              <a:t>🔧 上游技术（6家）</a:t>
             </a:r>
           </a:p>
         </p:txBody>
@@ -6196,7 +6406,112 @@
       </p:sp>
       <p:sp>
         <p:nvSpPr>
-          <p:cNvPr id="8" name="Rectangle 7"/>
+          <p:cNvPr id="8" name="TextBox 7"/>
+          <p:cNvSpPr txBox="1"/>
+          <p:nvPr/>
+        </p:nvSpPr>
+        <p:spPr>
+          <a:xfrm>
+            <a:off x="457200" y="2523744"/>
+            <a:ext cx="3474720" cy="201168"/>
+          </a:xfrm>
+          <a:prstGeom prst="rect">
+            <a:avLst/>
+          </a:prstGeom>
+          <a:noFill/>
+        </p:spPr>
+        <p:txBody>
+          <a:bodyPr wrap="square">
+            <a:spAutoFit/>
+          </a:bodyPr>
+          <a:lstStyle/>
+          <a:p>
+            <a:pPr algn="l">
+              <a:defRPr sz="750" b="0">
+                <a:solidFill>
+                  <a:srgbClr val="059669"/>
+                </a:solidFill>
+              </a:defRPr>
+            </a:pPr>
+            <a:r>
+              <a:t>[研] 广东交通职业技术学院</a:t>
+            </a:r>
+          </a:p>
+        </p:txBody>
+      </p:sp>
+      <p:sp>
+        <p:nvSpPr>
+          <p:cNvPr id="9" name="TextBox 8"/>
+          <p:cNvSpPr txBox="1"/>
+          <p:nvPr/>
+        </p:nvSpPr>
+        <p:spPr>
+          <a:xfrm>
+            <a:off x="457200" y="2724912"/>
+            <a:ext cx="3474720" cy="201168"/>
+          </a:xfrm>
+          <a:prstGeom prst="rect">
+            <a:avLst/>
+          </a:prstGeom>
+          <a:noFill/>
+        </p:spPr>
+        <p:txBody>
+          <a:bodyPr wrap="square">
+            <a:spAutoFit/>
+          </a:bodyPr>
+          <a:lstStyle/>
+          <a:p>
+            <a:pPr algn="l">
+              <a:defRPr sz="750" b="0">
+                <a:solidFill>
+                  <a:srgbClr val="059669"/>
+                </a:solidFill>
+              </a:defRPr>
+            </a:pPr>
+            <a:r>
+              <a:t>[研] 广州铁路职业技术学院</a:t>
+            </a:r>
+          </a:p>
+        </p:txBody>
+      </p:sp>
+      <p:sp>
+        <p:nvSpPr>
+          <p:cNvPr id="10" name="TextBox 9"/>
+          <p:cNvSpPr txBox="1"/>
+          <p:nvPr/>
+        </p:nvSpPr>
+        <p:spPr>
+          <a:xfrm>
+            <a:off x="457200" y="2926080"/>
+            <a:ext cx="3474720" cy="201168"/>
+          </a:xfrm>
+          <a:prstGeom prst="rect">
+            <a:avLst/>
+          </a:prstGeom>
+          <a:noFill/>
+        </p:spPr>
+        <p:txBody>
+          <a:bodyPr wrap="square">
+            <a:spAutoFit/>
+          </a:bodyPr>
+          <a:lstStyle/>
+          <a:p>
+            <a:pPr algn="l">
+              <a:defRPr sz="750" b="0">
+                <a:solidFill>
+                  <a:srgbClr val="059669"/>
+                </a:solidFill>
+              </a:defRPr>
+            </a:pPr>
+            <a:r>
+              <a:t>[研] 深圳技术大学城市交通与物流学院</a:t>
+            </a:r>
+          </a:p>
+        </p:txBody>
+      </p:sp>
+      <p:sp>
+        <p:nvSpPr>
+          <p:cNvPr id="11" name="Rectangle 10"/>
           <p:cNvSpPr/>
           <p:nvPr/>
         </p:nvSpPr>
@@ -6248,7 +6563,7 @@
       </p:sp>
       <p:sp>
         <p:nvSpPr>
-          <p:cNvPr id="9" name="TextBox 8"/>
+          <p:cNvPr id="12" name="TextBox 11"/>
           <p:cNvSpPr txBox="1"/>
           <p:nvPr/>
         </p:nvSpPr>
@@ -6283,7 +6598,7 @@
       </p:sp>
       <p:sp>
         <p:nvSpPr>
-          <p:cNvPr id="10" name="TextBox 9"/>
+          <p:cNvPr id="13" name="TextBox 12"/>
           <p:cNvSpPr txBox="1"/>
           <p:nvPr/>
         </p:nvSpPr>
@@ -6318,7 +6633,7 @@
       </p:sp>
       <p:sp>
         <p:nvSpPr>
-          <p:cNvPr id="11" name="TextBox 10"/>
+          <p:cNvPr id="14" name="TextBox 13"/>
           <p:cNvSpPr txBox="1"/>
           <p:nvPr/>
         </p:nvSpPr>
@@ -6353,7 +6668,7 @@
       </p:sp>
       <p:sp>
         <p:nvSpPr>
-          <p:cNvPr id="12" name="TextBox 11"/>
+          <p:cNvPr id="15" name="TextBox 14"/>
           <p:cNvSpPr txBox="1"/>
           <p:nvPr/>
         </p:nvSpPr>
@@ -6388,7 +6703,7 @@
       </p:sp>
       <p:sp>
         <p:nvSpPr>
-          <p:cNvPr id="13" name="TextBox 12"/>
+          <p:cNvPr id="16" name="TextBox 15"/>
           <p:cNvSpPr txBox="1"/>
           <p:nvPr/>
         </p:nvSpPr>
@@ -6423,7 +6738,7 @@
       </p:sp>
       <p:sp>
         <p:nvSpPr>
-          <p:cNvPr id="14" name="TextBox 13"/>
+          <p:cNvPr id="17" name="TextBox 16"/>
           <p:cNvSpPr txBox="1"/>
           <p:nvPr/>
         </p:nvSpPr>
@@ -6451,6 +6766,41 @@
               </a:defRPr>
             </a:pPr>
             <a:r>
+              <a:t>[国] 广州广电运通智能科技有限公司</a:t>
+            </a:r>
+          </a:p>
+        </p:txBody>
+      </p:sp>
+      <p:sp>
+        <p:nvSpPr>
+          <p:cNvPr id="18" name="TextBox 17"/>
+          <p:cNvSpPr txBox="1"/>
+          <p:nvPr/>
+        </p:nvSpPr>
+        <p:spPr>
+          <a:xfrm>
+            <a:off x="4297680" y="3127248"/>
+            <a:ext cx="3474720" cy="201168"/>
+          </a:xfrm>
+          <a:prstGeom prst="rect">
+            <a:avLst/>
+          </a:prstGeom>
+          <a:noFill/>
+        </p:spPr>
+        <p:txBody>
+          <a:bodyPr wrap="square">
+            <a:spAutoFit/>
+          </a:bodyPr>
+          <a:lstStyle/>
+          <a:p>
+            <a:pPr algn="l">
+              <a:defRPr sz="750" b="0">
+                <a:solidFill>
+                  <a:srgbClr val="D97706"/>
+                </a:solidFill>
+              </a:defRPr>
+            </a:pPr>
+            <a:r>
               <a:t>[国] 深圳中车轨道交通装备有限公司</a:t>
             </a:r>
           </a:p>
@@ -6458,13 +6808,13 @@
       </p:sp>
       <p:sp>
         <p:nvSpPr>
-          <p:cNvPr id="15" name="TextBox 14"/>
-          <p:cNvSpPr txBox="1"/>
-          <p:nvPr/>
-        </p:nvSpPr>
-        <p:spPr>
-          <a:xfrm>
-            <a:off x="4297680" y="3127248"/>
+          <p:cNvPr id="19" name="TextBox 18"/>
+          <p:cNvSpPr txBox="1"/>
+          <p:nvPr/>
+        </p:nvSpPr>
+        <p:spPr>
+          <a:xfrm>
+            <a:off x="4297680" y="3328416"/>
             <a:ext cx="3474720" cy="201168"/>
           </a:xfrm>
           <a:prstGeom prst="rect">
@@ -6493,13 +6843,13 @@
       </p:sp>
       <p:sp>
         <p:nvSpPr>
-          <p:cNvPr id="16" name="TextBox 15"/>
-          <p:cNvSpPr txBox="1"/>
-          <p:nvPr/>
-        </p:nvSpPr>
-        <p:spPr>
-          <a:xfrm>
-            <a:off x="4297680" y="3328416"/>
+          <p:cNvPr id="20" name="TextBox 19"/>
+          <p:cNvSpPr txBox="1"/>
+          <p:nvPr/>
+        </p:nvSpPr>
+        <p:spPr>
+          <a:xfrm>
+            <a:off x="4297680" y="3529584"/>
             <a:ext cx="3474720" cy="201168"/>
           </a:xfrm>
           <a:prstGeom prst="rect">
@@ -6528,13 +6878,13 @@
       </p:sp>
       <p:sp>
         <p:nvSpPr>
-          <p:cNvPr id="17" name="TextBox 16"/>
-          <p:cNvSpPr txBox="1"/>
-          <p:nvPr/>
-        </p:nvSpPr>
-        <p:spPr>
-          <a:xfrm>
-            <a:off x="4297680" y="3529584"/>
+          <p:cNvPr id="21" name="TextBox 20"/>
+          <p:cNvSpPr txBox="1"/>
+          <p:nvPr/>
+        </p:nvSpPr>
+        <p:spPr>
+          <a:xfrm>
+            <a:off x="4297680" y="3730752"/>
             <a:ext cx="3474720" cy="201168"/>
           </a:xfrm>
           <a:prstGeom prst="rect">
@@ -6563,13 +6913,13 @@
       </p:sp>
       <p:sp>
         <p:nvSpPr>
-          <p:cNvPr id="18" name="TextBox 17"/>
-          <p:cNvSpPr txBox="1"/>
-          <p:nvPr/>
-        </p:nvSpPr>
-        <p:spPr>
-          <a:xfrm>
-            <a:off x="4297680" y="3730752"/>
+          <p:cNvPr id="22" name="TextBox 21"/>
+          <p:cNvSpPr txBox="1"/>
+          <p:nvPr/>
+        </p:nvSpPr>
+        <p:spPr>
+          <a:xfrm>
+            <a:off x="4297680" y="3931920"/>
             <a:ext cx="3474720" cy="201168"/>
           </a:xfrm>
           <a:prstGeom prst="rect">
@@ -6598,13 +6948,13 @@
       </p:sp>
       <p:sp>
         <p:nvSpPr>
-          <p:cNvPr id="19" name="TextBox 18"/>
-          <p:cNvSpPr txBox="1"/>
-          <p:nvPr/>
-        </p:nvSpPr>
-        <p:spPr>
-          <a:xfrm>
-            <a:off x="4297680" y="3931920"/>
+          <p:cNvPr id="23" name="TextBox 22"/>
+          <p:cNvSpPr txBox="1"/>
+          <p:nvPr/>
+        </p:nvSpPr>
+        <p:spPr>
+          <a:xfrm>
+            <a:off x="4297680" y="4133088"/>
             <a:ext cx="3474720" cy="201168"/>
           </a:xfrm>
           <a:prstGeom prst="rect">
@@ -6626,41 +6976,6 @@
               </a:defRPr>
             </a:pPr>
             <a:r>
-              <a:t>[民] 广州广电运通智能科技有限公司</a:t>
-            </a:r>
-          </a:p>
-        </p:txBody>
-      </p:sp>
-      <p:sp>
-        <p:nvSpPr>
-          <p:cNvPr id="20" name="TextBox 19"/>
-          <p:cNvSpPr txBox="1"/>
-          <p:nvPr/>
-        </p:nvSpPr>
-        <p:spPr>
-          <a:xfrm>
-            <a:off x="4297680" y="4133088"/>
-            <a:ext cx="3474720" cy="201168"/>
-          </a:xfrm>
-          <a:prstGeom prst="rect">
-            <a:avLst/>
-          </a:prstGeom>
-          <a:noFill/>
-        </p:spPr>
-        <p:txBody>
-          <a:bodyPr wrap="square">
-            <a:spAutoFit/>
-          </a:bodyPr>
-          <a:lstStyle/>
-          <a:p>
-            <a:pPr algn="l">
-              <a:defRPr sz="750" b="0">
-                <a:solidFill>
-                  <a:srgbClr val="0891B2"/>
-                </a:solidFill>
-              </a:defRPr>
-            </a:pPr>
-            <a:r>
               <a:t>[民] 广联达数字科技（广州）有限公司</a:t>
             </a:r>
           </a:p>
@@ -6668,7 +6983,7 @@
       </p:sp>
       <p:sp>
         <p:nvSpPr>
-          <p:cNvPr id="21" name="Rectangle 20"/>
+          <p:cNvPr id="24" name="Rectangle 23"/>
           <p:cNvSpPr/>
           <p:nvPr/>
         </p:nvSpPr>
@@ -6713,14 +7028,14 @@
               </a:defRPr>
             </a:pPr>
             <a:r>
-              <a:t>📱 下游应用（5家）</a:t>
-            </a:r>
-          </a:p>
-        </p:txBody>
-      </p:sp>
-      <p:sp>
-        <p:nvSpPr>
-          <p:cNvPr id="22" name="TextBox 21"/>
+              <a:t>📱 下游应用（4家）</a:t>
+            </a:r>
+          </a:p>
+        </p:txBody>
+      </p:sp>
+      <p:sp>
+        <p:nvSpPr>
+          <p:cNvPr id="25" name="TextBox 24"/>
           <p:cNvSpPr txBox="1"/>
           <p:nvPr/>
         </p:nvSpPr>
@@ -6755,7 +7070,7 @@
       </p:sp>
       <p:sp>
         <p:nvSpPr>
-          <p:cNvPr id="23" name="TextBox 22"/>
+          <p:cNvPr id="26" name="TextBox 25"/>
           <p:cNvSpPr txBox="1"/>
           <p:nvPr/>
         </p:nvSpPr>
@@ -6790,7 +7105,7 @@
       </p:sp>
       <p:sp>
         <p:nvSpPr>
-          <p:cNvPr id="24" name="TextBox 23"/>
+          <p:cNvPr id="27" name="TextBox 26"/>
           <p:cNvSpPr txBox="1"/>
           <p:nvPr/>
         </p:nvSpPr>
@@ -6825,7 +7140,7 @@
       </p:sp>
       <p:sp>
         <p:nvSpPr>
-          <p:cNvPr id="25" name="TextBox 24"/>
+          <p:cNvPr id="28" name="TextBox 27"/>
           <p:cNvSpPr txBox="1"/>
           <p:nvPr/>
         </p:nvSpPr>
@@ -6854,41 +7169,6 @@
             </a:pPr>
             <a:r>
               <a:t>[民] 广州佳都方纬交通科技有限公司</a:t>
-            </a:r>
-          </a:p>
-        </p:txBody>
-      </p:sp>
-      <p:sp>
-        <p:nvSpPr>
-          <p:cNvPr id="26" name="TextBox 25"/>
-          <p:cNvSpPr txBox="1"/>
-          <p:nvPr/>
-        </p:nvSpPr>
-        <p:spPr>
-          <a:xfrm>
-            <a:off x="8138160" y="2724912"/>
-            <a:ext cx="3474720" cy="201168"/>
-          </a:xfrm>
-          <a:prstGeom prst="rect">
-            <a:avLst/>
-          </a:prstGeom>
-          <a:noFill/>
-        </p:spPr>
-        <p:txBody>
-          <a:bodyPr wrap="square">
-            <a:spAutoFit/>
-          </a:bodyPr>
-          <a:lstStyle/>
-          <a:p>
-            <a:pPr algn="l">
-              <a:defRPr sz="750" b="0">
-                <a:solidFill>
-                  <a:srgbClr val="059669"/>
-                </a:solidFill>
-              </a:defRPr>
-            </a:pPr>
-            <a:r>
-              <a:t>[研] 广州铁路职业技术学院</a:t>
             </a:r>
           </a:p>
         </p:txBody>
@@ -7001,7 +7281,7 @@
               </a:defRPr>
             </a:pPr>
             <a:r>
-              <a:t>共 13 家企业/机构涉及此场景</a:t>
+              <a:t>共 14 家企业/机构涉及此场景</a:t>
             </a:r>
           </a:p>
         </p:txBody>
@@ -7175,7 +7455,7 @@
               </a:defRPr>
             </a:pPr>
             <a:r>
-              <a:t>⚙️ 中游集成（8家）</a:t>
+              <a:t>⚙️ 中游集成（9家）</a:t>
             </a:r>
           </a:p>
         </p:txBody>
@@ -7385,6 +7665,41 @@
               </a:defRPr>
             </a:pPr>
             <a:r>
+              <a:t>[民] 广州蔚景科技有限公司</a:t>
+            </a:r>
+          </a:p>
+        </p:txBody>
+      </p:sp>
+      <p:sp>
+        <p:nvSpPr>
+          <p:cNvPr id="14" name="TextBox 13"/>
+          <p:cNvSpPr txBox="1"/>
+          <p:nvPr/>
+        </p:nvSpPr>
+        <p:spPr>
+          <a:xfrm>
+            <a:off x="4297680" y="3127248"/>
+            <a:ext cx="3474720" cy="201168"/>
+          </a:xfrm>
+          <a:prstGeom prst="rect">
+            <a:avLst/>
+          </a:prstGeom>
+          <a:noFill/>
+        </p:spPr>
+        <p:txBody>
+          <a:bodyPr wrap="square">
+            <a:spAutoFit/>
+          </a:bodyPr>
+          <a:lstStyle/>
+          <a:p>
+            <a:pPr algn="l">
+              <a:defRPr sz="750" b="0">
+                <a:solidFill>
+                  <a:srgbClr val="0891B2"/>
+                </a:solidFill>
+              </a:defRPr>
+            </a:pPr>
+            <a:r>
               <a:t>[民] 深圳市前海亿车科技有限公司</a:t>
             </a:r>
           </a:p>
@@ -7392,13 +7707,13 @@
       </p:sp>
       <p:sp>
         <p:nvSpPr>
-          <p:cNvPr id="14" name="TextBox 13"/>
-          <p:cNvSpPr txBox="1"/>
-          <p:nvPr/>
-        </p:nvSpPr>
-        <p:spPr>
-          <a:xfrm>
-            <a:off x="4297680" y="3127248"/>
+          <p:cNvPr id="15" name="TextBox 14"/>
+          <p:cNvSpPr txBox="1"/>
+          <p:nvPr/>
+        </p:nvSpPr>
+        <p:spPr>
+          <a:xfrm>
+            <a:off x="4297680" y="3328416"/>
             <a:ext cx="3474720" cy="201168"/>
           </a:xfrm>
           <a:prstGeom prst="rect">
@@ -7427,13 +7742,13 @@
       </p:sp>
       <p:sp>
         <p:nvSpPr>
-          <p:cNvPr id="15" name="TextBox 14"/>
-          <p:cNvSpPr txBox="1"/>
-          <p:nvPr/>
-        </p:nvSpPr>
-        <p:spPr>
-          <a:xfrm>
-            <a:off x="4297680" y="3328416"/>
+          <p:cNvPr id="16" name="TextBox 15"/>
+          <p:cNvSpPr txBox="1"/>
+          <p:nvPr/>
+        </p:nvSpPr>
+        <p:spPr>
+          <a:xfrm>
+            <a:off x="4297680" y="3529584"/>
             <a:ext cx="3474720" cy="201168"/>
           </a:xfrm>
           <a:prstGeom prst="rect">
@@ -7462,7 +7777,7 @@
       </p:sp>
       <p:sp>
         <p:nvSpPr>
-          <p:cNvPr id="16" name="Rectangle 15"/>
+          <p:cNvPr id="17" name="Rectangle 16"/>
           <p:cNvSpPr/>
           <p:nvPr/>
         </p:nvSpPr>
@@ -7514,7 +7829,7 @@
       </p:sp>
       <p:sp>
         <p:nvSpPr>
-          <p:cNvPr id="17" name="TextBox 16"/>
+          <p:cNvPr id="18" name="TextBox 17"/>
           <p:cNvSpPr txBox="1"/>
           <p:nvPr/>
         </p:nvSpPr>
@@ -7549,7 +7864,7 @@
       </p:sp>
       <p:sp>
         <p:nvSpPr>
-          <p:cNvPr id="18" name="TextBox 17"/>
+          <p:cNvPr id="19" name="TextBox 18"/>
           <p:cNvSpPr txBox="1"/>
           <p:nvPr/>
         </p:nvSpPr>
@@ -7584,7 +7899,7 @@
       </p:sp>
       <p:sp>
         <p:nvSpPr>
-          <p:cNvPr id="19" name="TextBox 18"/>
+          <p:cNvPr id="20" name="TextBox 19"/>
           <p:cNvSpPr txBox="1"/>
           <p:nvPr/>
         </p:nvSpPr>
@@ -7725,7 +8040,7 @@
               </a:defRPr>
             </a:pPr>
             <a:r>
-              <a:t>共 12 家企业/机构涉及此场景</a:t>
+              <a:t>共 20 家企业/机构涉及此场景</a:t>
             </a:r>
           </a:p>
         </p:txBody>
@@ -7777,7 +8092,7 @@
               </a:defRPr>
             </a:pPr>
             <a:r>
-              <a:t>🔧 上游技术（4家）</a:t>
+              <a:t>🔧 上游技术（9家）</a:t>
             </a:r>
           </a:p>
         </p:txBody>
@@ -7912,11 +8227,116 @@
             <a:pPr algn="l">
               <a:defRPr sz="750" b="0">
                 <a:solidFill>
+                  <a:srgbClr val="0891B2"/>
+                </a:solidFill>
+              </a:defRPr>
+            </a:pPr>
+            <a:r>
+              <a:t>[民] 深圳北斗应用技术研究院有限公司</a:t>
+            </a:r>
+          </a:p>
+        </p:txBody>
+      </p:sp>
+      <p:sp>
+        <p:nvSpPr>
+          <p:cNvPr id="9" name="TextBox 8"/>
+          <p:cNvSpPr txBox="1"/>
+          <p:nvPr/>
+        </p:nvSpPr>
+        <p:spPr>
+          <a:xfrm>
+            <a:off x="457200" y="2724912"/>
+            <a:ext cx="3474720" cy="201168"/>
+          </a:xfrm>
+          <a:prstGeom prst="rect">
+            <a:avLst/>
+          </a:prstGeom>
+          <a:noFill/>
+        </p:spPr>
+        <p:txBody>
+          <a:bodyPr wrap="square">
+            <a:spAutoFit/>
+          </a:bodyPr>
+          <a:lstStyle/>
+          <a:p>
+            <a:pPr algn="l">
+              <a:defRPr sz="750" b="0">
+                <a:solidFill>
                   <a:srgbClr val="059669"/>
                 </a:solidFill>
               </a:defRPr>
             </a:pPr>
             <a:r>
+              <a:t>[研] 广东交通职业技术学院</a:t>
+            </a:r>
+          </a:p>
+        </p:txBody>
+      </p:sp>
+      <p:sp>
+        <p:nvSpPr>
+          <p:cNvPr id="10" name="TextBox 9"/>
+          <p:cNvSpPr txBox="1"/>
+          <p:nvPr/>
+        </p:nvSpPr>
+        <p:spPr>
+          <a:xfrm>
+            <a:off x="457200" y="2926080"/>
+            <a:ext cx="3474720" cy="201168"/>
+          </a:xfrm>
+          <a:prstGeom prst="rect">
+            <a:avLst/>
+          </a:prstGeom>
+          <a:noFill/>
+        </p:spPr>
+        <p:txBody>
+          <a:bodyPr wrap="square">
+            <a:spAutoFit/>
+          </a:bodyPr>
+          <a:lstStyle/>
+          <a:p>
+            <a:pPr algn="l">
+              <a:defRPr sz="750" b="0">
+                <a:solidFill>
+                  <a:srgbClr val="059669"/>
+                </a:solidFill>
+              </a:defRPr>
+            </a:pPr>
+            <a:r>
+              <a:t>[研] 广东海洋大学海运学院</a:t>
+            </a:r>
+          </a:p>
+        </p:txBody>
+      </p:sp>
+      <p:sp>
+        <p:nvSpPr>
+          <p:cNvPr id="11" name="TextBox 10"/>
+          <p:cNvSpPr txBox="1"/>
+          <p:nvPr/>
+        </p:nvSpPr>
+        <p:spPr>
+          <a:xfrm>
+            <a:off x="457200" y="3127248"/>
+            <a:ext cx="3474720" cy="201168"/>
+          </a:xfrm>
+          <a:prstGeom prst="rect">
+            <a:avLst/>
+          </a:prstGeom>
+          <a:noFill/>
+        </p:spPr>
+        <p:txBody>
+          <a:bodyPr wrap="square">
+            <a:spAutoFit/>
+          </a:bodyPr>
+          <a:lstStyle/>
+          <a:p>
+            <a:pPr algn="l">
+              <a:defRPr sz="750" b="0">
+                <a:solidFill>
+                  <a:srgbClr val="059669"/>
+                </a:solidFill>
+              </a:defRPr>
+            </a:pPr>
+            <a:r>
               <a:t>[研] 广州航海学院</a:t>
             </a:r>
           </a:p>
@@ -7924,7 +8344,77 @@
       </p:sp>
       <p:sp>
         <p:nvSpPr>
-          <p:cNvPr id="9" name="Rectangle 8"/>
+          <p:cNvPr id="12" name="TextBox 11"/>
+          <p:cNvSpPr txBox="1"/>
+          <p:nvPr/>
+        </p:nvSpPr>
+        <p:spPr>
+          <a:xfrm>
+            <a:off x="457200" y="3328416"/>
+            <a:ext cx="3474720" cy="201168"/>
+          </a:xfrm>
+          <a:prstGeom prst="rect">
+            <a:avLst/>
+          </a:prstGeom>
+          <a:noFill/>
+        </p:spPr>
+        <p:txBody>
+          <a:bodyPr wrap="square">
+            <a:spAutoFit/>
+          </a:bodyPr>
+          <a:lstStyle/>
+          <a:p>
+            <a:pPr algn="l">
+              <a:defRPr sz="750" b="0">
+                <a:solidFill>
+                  <a:srgbClr val="059669"/>
+                </a:solidFill>
+              </a:defRPr>
+            </a:pPr>
+            <a:r>
+              <a:t>[研] 广州航海学院航运与交通学院</a:t>
+            </a:r>
+          </a:p>
+        </p:txBody>
+      </p:sp>
+      <p:sp>
+        <p:nvSpPr>
+          <p:cNvPr id="13" name="TextBox 12"/>
+          <p:cNvSpPr txBox="1"/>
+          <p:nvPr/>
+        </p:nvSpPr>
+        <p:spPr>
+          <a:xfrm>
+            <a:off x="457200" y="3529584"/>
+            <a:ext cx="3474720" cy="201168"/>
+          </a:xfrm>
+          <a:prstGeom prst="rect">
+            <a:avLst/>
+          </a:prstGeom>
+          <a:noFill/>
+        </p:spPr>
+        <p:txBody>
+          <a:bodyPr wrap="square">
+            <a:spAutoFit/>
+          </a:bodyPr>
+          <a:lstStyle/>
+          <a:p>
+            <a:pPr algn="l">
+              <a:defRPr sz="750" b="0">
+                <a:solidFill>
+                  <a:srgbClr val="059669"/>
+                </a:solidFill>
+              </a:defRPr>
+            </a:pPr>
+            <a:r>
+              <a:t>[研] 暨南大学物联网与物流工程研究院</a:t>
+            </a:r>
+          </a:p>
+        </p:txBody>
+      </p:sp>
+      <p:sp>
+        <p:nvSpPr>
+          <p:cNvPr id="14" name="Rectangle 13"/>
           <p:cNvSpPr/>
           <p:nvPr/>
         </p:nvSpPr>
@@ -7969,14 +8459,14 @@
               </a:defRPr>
             </a:pPr>
             <a:r>
-              <a:t>⚙️ 中游集成（5家）</a:t>
-            </a:r>
-          </a:p>
-        </p:txBody>
-      </p:sp>
-      <p:sp>
-        <p:nvSpPr>
-          <p:cNvPr id="10" name="TextBox 9"/>
+              <a:t>⚙️ 中游集成（7家）</a:t>
+            </a:r>
+          </a:p>
+        </p:txBody>
+      </p:sp>
+      <p:sp>
+        <p:nvSpPr>
+          <p:cNvPr id="15" name="TextBox 14"/>
           <p:cNvSpPr txBox="1"/>
           <p:nvPr/>
         </p:nvSpPr>
@@ -8011,7 +8501,7 @@
       </p:sp>
       <p:sp>
         <p:nvSpPr>
-          <p:cNvPr id="11" name="TextBox 10"/>
+          <p:cNvPr id="16" name="TextBox 15"/>
           <p:cNvSpPr txBox="1"/>
           <p:nvPr/>
         </p:nvSpPr>
@@ -8046,7 +8536,7 @@
       </p:sp>
       <p:sp>
         <p:nvSpPr>
-          <p:cNvPr id="12" name="TextBox 11"/>
+          <p:cNvPr id="17" name="TextBox 16"/>
           <p:cNvSpPr txBox="1"/>
           <p:nvPr/>
         </p:nvSpPr>
@@ -8081,7 +8571,7 @@
       </p:sp>
       <p:sp>
         <p:nvSpPr>
-          <p:cNvPr id="13" name="TextBox 12"/>
+          <p:cNvPr id="18" name="TextBox 17"/>
           <p:cNvSpPr txBox="1"/>
           <p:nvPr/>
         </p:nvSpPr>
@@ -8116,7 +8606,7 @@
       </p:sp>
       <p:sp>
         <p:nvSpPr>
-          <p:cNvPr id="14" name="TextBox 13"/>
+          <p:cNvPr id="19" name="TextBox 18"/>
           <p:cNvSpPr txBox="1"/>
           <p:nvPr/>
         </p:nvSpPr>
@@ -8144,6 +8634,76 @@
               </a:defRPr>
             </a:pPr>
             <a:r>
+              <a:t>[民] 广州数字方舟信息技术股份有限公司</a:t>
+            </a:r>
+          </a:p>
+        </p:txBody>
+      </p:sp>
+      <p:sp>
+        <p:nvSpPr>
+          <p:cNvPr id="20" name="TextBox 19"/>
+          <p:cNvSpPr txBox="1"/>
+          <p:nvPr/>
+        </p:nvSpPr>
+        <p:spPr>
+          <a:xfrm>
+            <a:off x="4297680" y="2926080"/>
+            <a:ext cx="3474720" cy="201168"/>
+          </a:xfrm>
+          <a:prstGeom prst="rect">
+            <a:avLst/>
+          </a:prstGeom>
+          <a:noFill/>
+        </p:spPr>
+        <p:txBody>
+          <a:bodyPr wrap="square">
+            <a:spAutoFit/>
+          </a:bodyPr>
+          <a:lstStyle/>
+          <a:p>
+            <a:pPr algn="l">
+              <a:defRPr sz="750" b="0">
+                <a:solidFill>
+                  <a:srgbClr val="0891B2"/>
+                </a:solidFill>
+              </a:defRPr>
+            </a:pPr>
+            <a:r>
+              <a:t>[民] 广州智臣信息科技有限公司</a:t>
+            </a:r>
+          </a:p>
+        </p:txBody>
+      </p:sp>
+      <p:sp>
+        <p:nvSpPr>
+          <p:cNvPr id="21" name="TextBox 20"/>
+          <p:cNvSpPr txBox="1"/>
+          <p:nvPr/>
+        </p:nvSpPr>
+        <p:spPr>
+          <a:xfrm>
+            <a:off x="4297680" y="3127248"/>
+            <a:ext cx="3474720" cy="201168"/>
+          </a:xfrm>
+          <a:prstGeom prst="rect">
+            <a:avLst/>
+          </a:prstGeom>
+          <a:noFill/>
+        </p:spPr>
+        <p:txBody>
+          <a:bodyPr wrap="square">
+            <a:spAutoFit/>
+          </a:bodyPr>
+          <a:lstStyle/>
+          <a:p>
+            <a:pPr algn="l">
+              <a:defRPr sz="750" b="0">
+                <a:solidFill>
+                  <a:srgbClr val="0891B2"/>
+                </a:solidFill>
+              </a:defRPr>
+            </a:pPr>
+            <a:r>
               <a:t>[民] 广州港数据科技有限公司</a:t>
             </a:r>
           </a:p>
@@ -8151,7 +8711,7 @@
       </p:sp>
       <p:sp>
         <p:nvSpPr>
-          <p:cNvPr id="15" name="Rectangle 14"/>
+          <p:cNvPr id="22" name="Rectangle 21"/>
           <p:cNvSpPr/>
           <p:nvPr/>
         </p:nvSpPr>
@@ -8196,14 +8756,14 @@
               </a:defRPr>
             </a:pPr>
             <a:r>
-              <a:t>📱 下游应用（3家）</a:t>
-            </a:r>
-          </a:p>
-        </p:txBody>
-      </p:sp>
-      <p:sp>
-        <p:nvSpPr>
-          <p:cNvPr id="16" name="TextBox 15"/>
+              <a:t>📱 下游应用（4家）</a:t>
+            </a:r>
+          </a:p>
+        </p:txBody>
+      </p:sp>
+      <p:sp>
+        <p:nvSpPr>
+          <p:cNvPr id="23" name="TextBox 22"/>
           <p:cNvSpPr txBox="1"/>
           <p:nvPr/>
         </p:nvSpPr>
@@ -8231,6 +8791,41 @@
               </a:defRPr>
             </a:pPr>
             <a:r>
+              <a:t>[国] 广州中交通信有限公司</a:t>
+            </a:r>
+          </a:p>
+        </p:txBody>
+      </p:sp>
+      <p:sp>
+        <p:nvSpPr>
+          <p:cNvPr id="24" name="TextBox 23"/>
+          <p:cNvSpPr txBox="1"/>
+          <p:nvPr/>
+        </p:nvSpPr>
+        <p:spPr>
+          <a:xfrm>
+            <a:off x="8138160" y="2121408"/>
+            <a:ext cx="3474720" cy="201168"/>
+          </a:xfrm>
+          <a:prstGeom prst="rect">
+            <a:avLst/>
+          </a:prstGeom>
+          <a:noFill/>
+        </p:spPr>
+        <p:txBody>
+          <a:bodyPr wrap="square">
+            <a:spAutoFit/>
+          </a:bodyPr>
+          <a:lstStyle/>
+          <a:p>
+            <a:pPr algn="l">
+              <a:defRPr sz="750" b="0">
+                <a:solidFill>
+                  <a:srgbClr val="D97706"/>
+                </a:solidFill>
+              </a:defRPr>
+            </a:pPr>
+            <a:r>
               <a:t>[国] 广州港集团有限公司</a:t>
             </a:r>
           </a:p>
@@ -8238,13 +8833,13 @@
       </p:sp>
       <p:sp>
         <p:nvSpPr>
-          <p:cNvPr id="17" name="TextBox 16"/>
-          <p:cNvSpPr txBox="1"/>
-          <p:nvPr/>
-        </p:nvSpPr>
-        <p:spPr>
-          <a:xfrm>
-            <a:off x="8138160" y="2121408"/>
+          <p:cNvPr id="25" name="TextBox 24"/>
+          <p:cNvSpPr txBox="1"/>
+          <p:nvPr/>
+        </p:nvSpPr>
+        <p:spPr>
+          <a:xfrm>
+            <a:off x="8138160" y="2322576"/>
             <a:ext cx="3474720" cy="201168"/>
           </a:xfrm>
           <a:prstGeom prst="rect">
@@ -8273,13 +8868,13 @@
       </p:sp>
       <p:sp>
         <p:nvSpPr>
-          <p:cNvPr id="18" name="TextBox 17"/>
-          <p:cNvSpPr txBox="1"/>
-          <p:nvPr/>
-        </p:nvSpPr>
-        <p:spPr>
-          <a:xfrm>
-            <a:off x="8138160" y="2322576"/>
+          <p:cNvPr id="26" name="TextBox 25"/>
+          <p:cNvSpPr txBox="1"/>
+          <p:nvPr/>
+        </p:nvSpPr>
+        <p:spPr>
+          <a:xfrm>
+            <a:off x="8138160" y="2523744"/>
             <a:ext cx="3474720" cy="201168"/>
           </a:xfrm>
           <a:prstGeom prst="rect">
@@ -8736,7 +9331,7 @@
               </a:defRPr>
             </a:pPr>
             <a:r>
-              <a:t>上游技术（137家）</a:t>
+              <a:t>上游技术（156家）</a:t>
             </a:r>
           </a:p>
         </p:txBody>
@@ -8836,12 +9431,12 @@
             <a:pPr algn="l">
               <a:defRPr sz="700" b="0">
                 <a:solidFill>
-                  <a:srgbClr val="0891B2"/>
-                </a:solidFill>
-              </a:defRPr>
-            </a:pPr>
-            <a:r>
-              <a:t>[民] 中兴通讯股份有限公司</a:t>
+                  <a:srgbClr val="059669"/>
+                </a:solidFill>
+              </a:defRPr>
+            </a:pPr>
+            <a:r>
+              <a:t>[研] 东莞理工学院生态环境与建筑工程学院</a:t>
             </a:r>
           </a:p>
         </p:txBody>
@@ -8871,12 +9466,12 @@
             <a:pPr algn="l">
               <a:defRPr sz="700" b="0">
                 <a:solidFill>
-                  <a:srgbClr val="D97706"/>
-                </a:solidFill>
-              </a:defRPr>
-            </a:pPr>
-            <a:r>
-              <a:t>[国] 中国电信股份有限公司广东分公司</a:t>
+                  <a:srgbClr val="0891B2"/>
+                </a:solidFill>
+              </a:defRPr>
+            </a:pPr>
+            <a:r>
+              <a:t>[民] 中兴通讯股份有限公司</a:t>
             </a:r>
           </a:p>
         </p:txBody>
@@ -8911,7 +9506,7 @@
               </a:defRPr>
             </a:pPr>
             <a:r>
-              <a:t>[国] 中国移动通信集团广东有限公司</a:t>
+              <a:t>[国] 中国电信股份有限公司广东分公司</a:t>
             </a:r>
           </a:p>
         </p:txBody>
@@ -8946,7 +9541,7 @@
               </a:defRPr>
             </a:pPr>
             <a:r>
-              <a:t>[国] 中国联合网络通信有限公司中山市分公司</a:t>
+              <a:t>[国] 中国移动通信集团广东有限公司</a:t>
             </a:r>
           </a:p>
         </p:txBody>
@@ -8981,7 +9576,7 @@
               </a:defRPr>
             </a:pPr>
             <a:r>
-              <a:t>[国] 中国联合网络通信有限公司广东省分公司</a:t>
+              <a:t>[国] 中国联合网络通信有限公司中山市分公司</a:t>
             </a:r>
           </a:p>
         </p:txBody>
@@ -9011,12 +9606,12 @@
             <a:pPr algn="l">
               <a:defRPr sz="700" b="0">
                 <a:solidFill>
-                  <a:srgbClr val="059669"/>
-                </a:solidFill>
-              </a:defRPr>
-            </a:pPr>
-            <a:r>
-              <a:t>[研] 中山大学智能工程学院</a:t>
+                  <a:srgbClr val="D97706"/>
+                </a:solidFill>
+              </a:defRPr>
+            </a:pPr>
+            <a:r>
+              <a:t>[国] 中国联合网络通信有限公司广东省分公司</a:t>
             </a:r>
           </a:p>
         </p:txBody>
@@ -9046,12 +9641,12 @@
             <a:pPr algn="l">
               <a:defRPr sz="700" b="0">
                 <a:solidFill>
-                  <a:srgbClr val="0891B2"/>
-                </a:solidFill>
-              </a:defRPr>
-            </a:pPr>
-            <a:r>
-              <a:t>[民] 中山市人杰职业培训学校有限公司</a:t>
+                  <a:srgbClr val="059669"/>
+                </a:solidFill>
+              </a:defRPr>
+            </a:pPr>
+            <a:r>
+              <a:t>[研] 中山大学智能交通研究中心</a:t>
             </a:r>
           </a:p>
         </p:txBody>
@@ -9081,12 +9676,12 @@
             <a:pPr algn="l">
               <a:defRPr sz="700" b="0">
                 <a:solidFill>
-                  <a:srgbClr val="D97706"/>
-                </a:solidFill>
-              </a:defRPr>
-            </a:pPr>
-            <a:r>
-              <a:t>[国] 中电科普天科技股份有限公司</a:t>
+                  <a:srgbClr val="059669"/>
+                </a:solidFill>
+              </a:defRPr>
+            </a:pPr>
+            <a:r>
+              <a:t>[研] 中山大学智能工程学院</a:t>
             </a:r>
           </a:p>
         </p:txBody>
@@ -9121,7 +9716,7 @@
               </a:defRPr>
             </a:pPr>
             <a:r>
-              <a:t>[民] 中电科金仓（北京）科技股份有限公司</a:t>
+              <a:t>[民] 中山市人杰职业培训学校有限公司</a:t>
             </a:r>
           </a:p>
         </p:txBody>
@@ -9151,12 +9746,12 @@
             <a:pPr algn="l">
               <a:defRPr sz="700" b="0">
                 <a:solidFill>
-                  <a:srgbClr val="0891B2"/>
-                </a:solidFill>
-              </a:defRPr>
-            </a:pPr>
-            <a:r>
-              <a:t>[民] 中科星图数字地球合肥有限公司</a:t>
+                  <a:srgbClr val="D97706"/>
+                </a:solidFill>
+              </a:defRPr>
+            </a:pPr>
+            <a:r>
+              <a:t>[国] 中电科普天科技股份有限公司</a:t>
             </a:r>
           </a:p>
         </p:txBody>
@@ -9191,7 +9786,7 @@
               </a:defRPr>
             </a:pPr>
             <a:r>
-              <a:t>[民] 云宏信息科技股份有限公司</a:t>
+              <a:t>[民] 中电科金仓（北京）科技股份有限公司</a:t>
             </a:r>
           </a:p>
         </p:txBody>
@@ -9226,7 +9821,7 @@
               </a:defRPr>
             </a:pPr>
             <a:r>
-              <a:t>[民] 云念软件（广东）有限公司</a:t>
+              <a:t>[民] 中科星图数字地球合肥有限公司</a:t>
             </a:r>
           </a:p>
         </p:txBody>
@@ -9261,7 +9856,7 @@
               </a:defRPr>
             </a:pPr>
             <a:r>
-              <a:t>[民] 亚信安全科技股份有限公司</a:t>
+              <a:t>[民] 云宏信息科技股份有限公司</a:t>
             </a:r>
           </a:p>
         </p:txBody>
@@ -9296,7 +9891,7 @@
               </a:defRPr>
             </a:pPr>
             <a:r>
-              <a:t>[民] 亿航智能设备有限公司</a:t>
+              <a:t>[民] 云念软件（广东）有限公司</a:t>
             </a:r>
           </a:p>
         </p:txBody>
@@ -9326,12 +9921,12 @@
             <a:pPr algn="l">
               <a:defRPr sz="700" b="0">
                 <a:solidFill>
-                  <a:srgbClr val="0891B2"/>
-                </a:solidFill>
-              </a:defRPr>
-            </a:pPr>
-            <a:r>
-              <a:t>[民] 佛山市青松科技股份有限公司</a:t>
+                  <a:srgbClr val="059669"/>
+                </a:solidFill>
+              </a:defRPr>
+            </a:pPr>
+            <a:r>
+              <a:t>[研] 五邑大学土木建筑学院</a:t>
             </a:r>
           </a:p>
         </p:txBody>
@@ -9366,7 +9961,7 @@
               </a:defRPr>
             </a:pPr>
             <a:r>
-              <a:t>[民] 佳都科技集团股份有限公司</a:t>
+              <a:t>[民] 亚信安全科技股份有限公司</a:t>
             </a:r>
           </a:p>
         </p:txBody>
@@ -9401,7 +9996,7 @@
               </a:defRPr>
             </a:pPr>
             <a:r>
-              <a:t>[民] 北京万集科技股份有限公司</a:t>
+              <a:t>[民] 亿航智能设备有限公司</a:t>
             </a:r>
           </a:p>
         </p:txBody>
@@ -9431,12 +10026,12 @@
             <a:pPr algn="l">
               <a:defRPr sz="700" b="0">
                 <a:solidFill>
-                  <a:srgbClr val="0891B2"/>
-                </a:solidFill>
-              </a:defRPr>
-            </a:pPr>
-            <a:r>
-              <a:t>[民] 北京信安世纪科技股份有限公司</a:t>
+                  <a:srgbClr val="059669"/>
+                </a:solidFill>
+              </a:defRPr>
+            </a:pPr>
+            <a:r>
+              <a:t>[研] 佛山大学交通与土木建筑学院</a:t>
             </a:r>
           </a:p>
         </p:txBody>
@@ -9471,7 +10066,7 @@
               </a:defRPr>
             </a:pPr>
             <a:r>
-              <a:t>[民] 北京卓视智通科技有限责任公司</a:t>
+              <a:t>[民] 佛山市青松科技股份有限公司</a:t>
             </a:r>
           </a:p>
         </p:txBody>
@@ -9506,7 +10101,7 @@
               </a:defRPr>
             </a:pPr>
             <a:r>
-              <a:t>[民] 北京博研智通科技有限公司</a:t>
+              <a:t>[民] 佳都科技集团股份有限公司</a:t>
             </a:r>
           </a:p>
         </p:txBody>
@@ -9541,7 +10136,7 @@
               </a:defRPr>
             </a:pPr>
             <a:r>
-              <a:t>[民] 北京启明星辰信息安全技术有限公司</a:t>
+              <a:t>[民] 北京万集科技股份有限公司</a:t>
             </a:r>
           </a:p>
         </p:txBody>
@@ -9576,7 +10171,7 @@
               </a:defRPr>
             </a:pPr>
             <a:r>
-              <a:t>[民] 北京四维图新科技股份有限公司</a:t>
+              <a:t>[民] 北京信安世纪科技股份有限公司</a:t>
             </a:r>
           </a:p>
         </p:txBody>
@@ -9611,7 +10206,7 @@
               </a:defRPr>
             </a:pPr>
             <a:r>
-              <a:t>[民] 北京天融信网络安全技术有限公司广州分公司</a:t>
+              <a:t>[民] 北京卓视智通科技有限责任公司</a:t>
             </a:r>
           </a:p>
         </p:txBody>
@@ -9641,12 +10236,12 @@
             <a:pPr algn="l">
               <a:defRPr sz="700" b="0">
                 <a:solidFill>
-                  <a:srgbClr val="059669"/>
-                </a:solidFill>
-              </a:defRPr>
-            </a:pPr>
-            <a:r>
-              <a:t>[研] 北京理工大学珠海学院</a:t>
+                  <a:srgbClr val="0891B2"/>
+                </a:solidFill>
+              </a:defRPr>
+            </a:pPr>
+            <a:r>
+              <a:t>[民] 北京博研智通科技有限公司</a:t>
             </a:r>
           </a:p>
         </p:txBody>
@@ -9681,7 +10276,7 @@
               </a:defRPr>
             </a:pPr>
             <a:r>
-              <a:t>[民] 北京神州绿盟科技有限公司</a:t>
+              <a:t>[民] 北京启明星辰信息安全技术有限公司</a:t>
             </a:r>
           </a:p>
         </p:txBody>
@@ -9716,7 +10311,7 @@
               </a:defRPr>
             </a:pPr>
             <a:r>
-              <a:t>[民] 北京网御星云信息技术有限公司</a:t>
+              <a:t>[民] 北京四维图新科技股份有限公司</a:t>
             </a:r>
           </a:p>
         </p:txBody>
@@ -9746,12 +10341,12 @@
             <a:pPr algn="l">
               <a:defRPr sz="700" b="0">
                 <a:solidFill>
-                  <a:srgbClr val="059669"/>
-                </a:solidFill>
-              </a:defRPr>
-            </a:pPr>
-            <a:r>
-              <a:t>[研] 北京航空航天大学深圳研究院</a:t>
+                  <a:srgbClr val="0891B2"/>
+                </a:solidFill>
+              </a:defRPr>
+            </a:pPr>
+            <a:r>
+              <a:t>[民] 北京天融信网络安全技术有限公司广州分公司</a:t>
             </a:r>
           </a:p>
         </p:txBody>
@@ -9781,12 +10376,12 @@
             <a:pPr algn="l">
               <a:defRPr sz="700" b="0">
                 <a:solidFill>
-                  <a:srgbClr val="0891B2"/>
-                </a:solidFill>
-              </a:defRPr>
-            </a:pPr>
-            <a:r>
-              <a:t>[民] 北京视讯伟业科技有限公司</a:t>
+                  <a:srgbClr val="059669"/>
+                </a:solidFill>
+              </a:defRPr>
+            </a:pPr>
+            <a:r>
+              <a:t>[研] 北京理工大学珠海学院</a:t>
             </a:r>
           </a:p>
         </p:txBody>
@@ -9821,7 +10416,7 @@
               </a:defRPr>
             </a:pPr>
             <a:r>
-              <a:t>中游集成（188家）</a:t>
+              <a:t>中游集成（190家）</a:t>
             </a:r>
           </a:p>
         </p:txBody>
@@ -10906,7 +11501,7 @@
               </a:defRPr>
             </a:pPr>
             <a:r>
-              <a:t>下游应用（72家）</a:t>
+              <a:t>下游应用（71家）</a:t>
             </a:r>
           </a:p>
         </p:txBody>
@@ -12104,7 +12699,7 @@
               </a:defRPr>
             </a:pPr>
             <a:r>
-              <a:t>国央企</a:t>
+              <a:t>央国企</a:t>
             </a:r>
           </a:p>
         </p:txBody>
@@ -12139,7 +12734,7 @@
               </a:defRPr>
             </a:pPr>
             <a:r>
-              <a:t>93 家（23.4%）</a:t>
+              <a:t>95 家（22.8%）</a:t>
             </a:r>
           </a:p>
         </p:txBody>
@@ -12209,7 +12804,7 @@
               </a:defRPr>
             </a:pPr>
             <a:r>
-              <a:t>285 家（71.8%）</a:t>
+              <a:t>285 家（68.3%）</a:t>
             </a:r>
           </a:p>
         </p:txBody>
@@ -12279,7 +12874,7 @@
               </a:defRPr>
             </a:pPr>
             <a:r>
-              <a:t>19 家（4.8%）</a:t>
+              <a:t>37 家（8.9%）</a:t>
             </a:r>
           </a:p>
         </p:txBody>
@@ -12384,7 +12979,7 @@
               </a:defRPr>
             </a:pPr>
             <a:r>
-              <a:t>137 家（34.5%）</a:t>
+              <a:t>156 家（37.4%）</a:t>
             </a:r>
           </a:p>
         </p:txBody>
@@ -12454,7 +13049,7 @@
               </a:defRPr>
             </a:pPr>
             <a:r>
-              <a:t>188 家（47.4%）</a:t>
+              <a:t>190 家（45.6%）</a:t>
             </a:r>
           </a:p>
         </p:txBody>
@@ -12524,7 +13119,7 @@
               </a:defRPr>
             </a:pPr>
             <a:r>
-              <a:t>72 家（18.1%）</a:t>
+              <a:t>71 家（17.0%）</a:t>
             </a:r>
           </a:p>
         </p:txBody>
@@ -12629,7 +13224,7 @@
               </a:defRPr>
             </a:pPr>
             <a:r>
-              <a:t>232 家</a:t>
+              <a:t>250 家</a:t>
             </a:r>
           </a:p>
         </p:txBody>
@@ -12699,7 +13294,7 @@
               </a:defRPr>
             </a:pPr>
             <a:r>
-              <a:t>114 家</a:t>
+              <a:t>130 家</a:t>
             </a:r>
           </a:p>
         </p:txBody>
@@ -12769,7 +13364,7 @@
               </a:defRPr>
             </a:pPr>
             <a:r>
-              <a:t>76 家</a:t>
+              <a:t>92 家</a:t>
             </a:r>
           </a:p>
         </p:txBody>
@@ -12839,7 +13434,7 @@
               </a:defRPr>
             </a:pPr>
             <a:r>
-              <a:t>63 家</a:t>
+              <a:t>73 家</a:t>
             </a:r>
           </a:p>
         </p:txBody>
@@ -12874,7 +13469,7 @@
               </a:defRPr>
             </a:pPr>
             <a:r>
-              <a:t>自动驾驶</a:t>
+              <a:t>湾区MaaS</a:t>
             </a:r>
           </a:p>
         </p:txBody>
@@ -12909,7 +13504,7 @@
               </a:defRPr>
             </a:pPr>
             <a:r>
-              <a:t>52 家</a:t>
+              <a:t>67 家</a:t>
             </a:r>
           </a:p>
         </p:txBody>
@@ -12944,7 +13539,7 @@
               </a:defRPr>
             </a:pPr>
             <a:r>
-              <a:t>湾区MaaS</a:t>
+              <a:t>自动驾驶</a:t>
             </a:r>
           </a:p>
         </p:txBody>
@@ -12979,7 +13574,7 @@
               </a:defRPr>
             </a:pPr>
             <a:r>
-              <a:t>52 家</a:t>
+              <a:t>64 家</a:t>
             </a:r>
           </a:p>
         </p:txBody>
@@ -13049,7 +13644,7 @@
               </a:defRPr>
             </a:pPr>
             <a:r>
-              <a:t>36 家</a:t>
+              <a:t>45 家</a:t>
             </a:r>
           </a:p>
         </p:txBody>
@@ -13189,7 +13784,7 @@
               </a:defRPr>
             </a:pPr>
             <a:r>
-              <a:t>20 家</a:t>
+              <a:t>22 家</a:t>
             </a:r>
           </a:p>
         </p:txBody>
@@ -13224,7 +13819,7 @@
               </a:defRPr>
             </a:pPr>
             <a:r>
-              <a:t>智慧停车</a:t>
+              <a:t>智慧港航</a:t>
             </a:r>
           </a:p>
         </p:txBody>
@@ -13259,7 +13854,7 @@
               </a:defRPr>
             </a:pPr>
             <a:r>
-              <a:t>13 家</a:t>
+              <a:t>20 家</a:t>
             </a:r>
           </a:p>
         </p:txBody>
@@ -13584,7 +14179,7 @@
               </a:defRPr>
             </a:pPr>
             <a:r>
-              <a:t>• 三大企业类型：国央企 / 民企 / 科研机构</a:t>
+              <a:t>• 三大企业类型：央国企 / 民企 / 科研机构</a:t>
             </a:r>
           </a:p>
         </p:txBody>
@@ -13649,7 +14244,7 @@
               </a:defRPr>
             </a:pPr>
             <a:r>
-              <a:t>收录企业总数：397 家</a:t>
+              <a:t>收录企业总数：417 家</a:t>
             </a:r>
           </a:p>
           <a:p>
@@ -13691,7 +14286,7 @@
               </a:defRPr>
             </a:pPr>
             <a:r>
-              <a:t>  上游技术：137 家</a:t>
+              <a:t>  上游技术：156 家</a:t>
             </a:r>
           </a:p>
           <a:p>
@@ -13706,7 +14301,7 @@
               </a:defRPr>
             </a:pPr>
             <a:r>
-              <a:t>  中游集成：188 家</a:t>
+              <a:t>  中游集成：190 家</a:t>
             </a:r>
           </a:p>
           <a:p>
@@ -13721,7 +14316,7 @@
               </a:defRPr>
             </a:pPr>
             <a:r>
-              <a:t>  下游应用：72 家</a:t>
+              <a:t>  下游应用：71 家</a:t>
             </a:r>
           </a:p>
           <a:p>
@@ -13763,7 +14358,7 @@
               </a:defRPr>
             </a:pPr>
             <a:r>
-              <a:t>  国央企：93 家</a:t>
+              <a:t>  央国企：95 家</a:t>
             </a:r>
           </a:p>
           <a:p>
@@ -13793,7 +14388,7 @@
               </a:defRPr>
             </a:pPr>
             <a:r>
-              <a:t>  科研机构：19 家</a:t>
+              <a:t>  科研机构：37 家</a:t>
             </a:r>
           </a:p>
           <a:p>
@@ -14314,7 +14909,7 @@
               </a:defRPr>
             </a:pPr>
             <a:r>
-              <a:t>67</a:t>
+              <a:t>83</a:t>
             </a:r>
           </a:p>
         </p:txBody>
@@ -14392,7 +14987,7 @@
               </a:defRPr>
             </a:pPr>
             <a:r>
-              <a:t>149</a:t>
+              <a:t>152</a:t>
             </a:r>
           </a:p>
         </p:txBody>
@@ -14548,7 +15143,7 @@
               </a:defRPr>
             </a:pPr>
             <a:r>
-              <a:t>231</a:t>
+              <a:t>250</a:t>
             </a:r>
           </a:p>
         </p:txBody>
@@ -14618,7 +15213,7 @@
               </a:defRPr>
             </a:pPr>
             <a:r>
-              <a:t>33</a:t>
+              <a:t>40</a:t>
             </a:r>
           </a:p>
         </p:txBody>
@@ -14653,7 +15248,7 @@
               </a:defRPr>
             </a:pPr>
             <a:r>
-              <a:t>56</a:t>
+              <a:t>65</a:t>
             </a:r>
           </a:p>
         </p:txBody>
@@ -14688,7 +15283,7 @@
               </a:defRPr>
             </a:pPr>
             <a:r>
-              <a:t>22</a:t>
+              <a:t>25</a:t>
             </a:r>
           </a:p>
         </p:txBody>
@@ -14723,7 +15318,7 @@
               </a:defRPr>
             </a:pPr>
             <a:r>
-              <a:t>111</a:t>
+              <a:t>130</a:t>
             </a:r>
           </a:p>
         </p:txBody>
@@ -14879,7 +15474,7 @@
               </a:defRPr>
             </a:pPr>
             <a:r>
-              <a:t>16</a:t>
+              <a:t>29</a:t>
             </a:r>
           </a:p>
         </p:txBody>
@@ -14957,7 +15552,7 @@
               </a:defRPr>
             </a:pPr>
             <a:r>
-              <a:t>50</a:t>
+              <a:t>53</a:t>
             </a:r>
           </a:p>
         </p:txBody>
@@ -15113,7 +15708,7 @@
               </a:defRPr>
             </a:pPr>
             <a:r>
-              <a:t>76</a:t>
+              <a:t>92</a:t>
             </a:r>
           </a:p>
         </p:txBody>
@@ -15183,7 +15778,7 @@
               </a:defRPr>
             </a:pPr>
             <a:r>
-              <a:t>46</a:t>
+              <a:t>54</a:t>
             </a:r>
           </a:p>
         </p:txBody>
@@ -15218,7 +15813,7 @@
               </a:defRPr>
             </a:pPr>
             <a:r>
-              <a:t>15</a:t>
+              <a:t>17</a:t>
             </a:r>
           </a:p>
         </p:txBody>
@@ -15288,7 +15883,7 @@
               </a:defRPr>
             </a:pPr>
             <a:r>
-              <a:t>63</a:t>
+              <a:t>73</a:t>
             </a:r>
           </a:p>
         </p:txBody>
@@ -15444,7 +16039,7 @@
               </a:defRPr>
             </a:pPr>
             <a:r>
-              <a:t>42</a:t>
+              <a:t>50</a:t>
             </a:r>
           </a:p>
         </p:txBody>
@@ -15522,7 +16117,7 @@
               </a:defRPr>
             </a:pPr>
             <a:r>
-              <a:t>3</a:t>
+              <a:t>6</a:t>
             </a:r>
           </a:p>
         </p:txBody>
@@ -15600,7 +16195,7 @@
               </a:defRPr>
             </a:pPr>
             <a:r>
-              <a:t>7</a:t>
+              <a:t>8</a:t>
             </a:r>
           </a:p>
         </p:txBody>
@@ -15678,7 +16273,7 @@
               </a:defRPr>
             </a:pPr>
             <a:r>
-              <a:t>52</a:t>
+              <a:t>64</a:t>
             </a:r>
           </a:p>
         </p:txBody>
@@ -15748,7 +16343,7 @@
               </a:defRPr>
             </a:pPr>
             <a:r>
-              <a:t>2</a:t>
+              <a:t>7</a:t>
             </a:r>
           </a:p>
         </p:txBody>
@@ -15783,7 +16378,7 @@
               </a:defRPr>
             </a:pPr>
             <a:r>
-              <a:t>16</a:t>
+              <a:t>23</a:t>
             </a:r>
           </a:p>
         </p:txBody>
@@ -15818,7 +16413,7 @@
               </a:defRPr>
             </a:pPr>
             <a:r>
-              <a:t>34</a:t>
+              <a:t>37</a:t>
             </a:r>
           </a:p>
         </p:txBody>
@@ -15853,7 +16448,7 @@
               </a:defRPr>
             </a:pPr>
             <a:r>
-              <a:t>52</a:t>
+              <a:t>67</a:t>
             </a:r>
           </a:p>
         </p:txBody>
@@ -16313,7 +16908,7 @@
               </a:defRPr>
             </a:pPr>
             <a:r>
-              <a:t>24</a:t>
+              <a:t>27</a:t>
             </a:r>
           </a:p>
         </p:txBody>
@@ -16348,7 +16943,7 @@
               </a:defRPr>
             </a:pPr>
             <a:r>
-              <a:t>8</a:t>
+              <a:t>13</a:t>
             </a:r>
           </a:p>
         </p:txBody>
@@ -16383,7 +16978,7 @@
               </a:defRPr>
             </a:pPr>
             <a:r>
-              <a:t>4</a:t>
+              <a:t>5</a:t>
             </a:r>
           </a:p>
         </p:txBody>
@@ -16418,7 +17013,7 @@
               </a:defRPr>
             </a:pPr>
             <a:r>
-              <a:t>36</a:t>
+              <a:t>45</a:t>
             </a:r>
           </a:p>
         </p:txBody>
@@ -16574,7 +17169,7 @@
               </a:defRPr>
             </a:pPr>
             <a:r>
-              <a:t>3</a:t>
+              <a:t>6</a:t>
             </a:r>
           </a:p>
         </p:txBody>
@@ -16730,7 +17325,7 @@
               </a:defRPr>
             </a:pPr>
             <a:r>
-              <a:t>5</a:t>
+              <a:t>4</a:t>
             </a:r>
           </a:p>
         </p:txBody>
@@ -16808,7 +17403,7 @@
               </a:defRPr>
             </a:pPr>
             <a:r>
-              <a:t>20</a:t>
+              <a:t>22</a:t>
             </a:r>
           </a:p>
         </p:txBody>
@@ -16913,7 +17508,7 @@
               </a:defRPr>
             </a:pPr>
             <a:r>
-              <a:t>8</a:t>
+              <a:t>9</a:t>
             </a:r>
           </a:p>
         </p:txBody>
@@ -16983,7 +17578,7 @@
               </a:defRPr>
             </a:pPr>
             <a:r>
-              <a:t>13</a:t>
+              <a:t>14</a:t>
             </a:r>
           </a:p>
         </p:txBody>
@@ -17139,7 +17734,7 @@
               </a:defRPr>
             </a:pPr>
             <a:r>
-              <a:t>4</a:t>
+              <a:t>9</a:t>
             </a:r>
           </a:p>
         </p:txBody>
@@ -17217,7 +17812,7 @@
               </a:defRPr>
             </a:pPr>
             <a:r>
-              <a:t>5</a:t>
+              <a:t>7</a:t>
             </a:r>
           </a:p>
         </p:txBody>
@@ -17295,7 +17890,7 @@
               </a:defRPr>
             </a:pPr>
             <a:r>
-              <a:t>3</a:t>
+              <a:t>4</a:t>
             </a:r>
           </a:p>
         </p:txBody>
@@ -17373,7 +17968,7 @@
               </a:defRPr>
             </a:pPr>
             <a:r>
-              <a:t>12</a:t>
+              <a:t>20</a:t>
             </a:r>
           </a:p>
         </p:txBody>
@@ -17661,7 +18256,7 @@
               </a:defRPr>
             </a:pPr>
             <a:r>
-              <a:t>共 231 家企业/机构涉及此场景</a:t>
+              <a:t>共 250 家企业/机构涉及此场景</a:t>
             </a:r>
           </a:p>
         </p:txBody>
@@ -17713,7 +18308,7 @@
               </a:defRPr>
             </a:pPr>
             <a:r>
-              <a:t>🔧 上游技术（67家）</a:t>
+              <a:t>🔧 上游技术（83家）</a:t>
             </a:r>
           </a:p>
         </p:txBody>
@@ -18378,7 +18973,7 @@
               </a:defRPr>
             </a:pPr>
             <a:r>
-              <a:t>...及其他 49 家</a:t>
+              <a:t>...及其他 65 家</a:t>
             </a:r>
           </a:p>
         </p:txBody>
@@ -18430,7 +19025,7 @@
               </a:defRPr>
             </a:pPr>
             <a:r>
-              <a:t>⚙️ 中游集成（149家）</a:t>
+              <a:t>⚙️ 中游集成（152家）</a:t>
             </a:r>
           </a:p>
         </p:txBody>
@@ -19095,7 +19690,7 @@
               </a:defRPr>
             </a:pPr>
             <a:r>
-              <a:t>...及其他 131 家</a:t>
+              <a:t>...及其他 134 家</a:t>
             </a:r>
           </a:p>
         </p:txBody>
@@ -19785,7 +20380,7 @@
               </a:defRPr>
             </a:pPr>
             <a:r>
-              <a:t>共 111 家企业/机构涉及此场景</a:t>
+              <a:t>共 130 家企业/机构涉及此场景</a:t>
             </a:r>
           </a:p>
         </p:txBody>
@@ -19837,7 +20432,7 @@
               </a:defRPr>
             </a:pPr>
             <a:r>
-              <a:t>🔧 上游技术（33家）</a:t>
+              <a:t>🔧 上游技术（40家）</a:t>
             </a:r>
           </a:p>
         </p:txBody>
@@ -20502,7 +21097,7 @@
               </a:defRPr>
             </a:pPr>
             <a:r>
-              <a:t>...及其他 15 家</a:t>
+              <a:t>...及其他 22 家</a:t>
             </a:r>
           </a:p>
         </p:txBody>
@@ -20554,7 +21149,7 @@
               </a:defRPr>
             </a:pPr>
             <a:r>
-              <a:t>⚙️ 中游集成（56家）</a:t>
+              <a:t>⚙️ 中游集成（65家）</a:t>
             </a:r>
           </a:p>
         </p:txBody>
@@ -21219,7 +21814,7 @@
               </a:defRPr>
             </a:pPr>
             <a:r>
-              <a:t>...及其他 38 家</a:t>
+              <a:t>...及其他 47 家</a:t>
             </a:r>
           </a:p>
         </p:txBody>
@@ -21271,7 +21866,7 @@
               </a:defRPr>
             </a:pPr>
             <a:r>
-              <a:t>📱 下游应用（22家）</a:t>
+              <a:t>📱 下游应用（25家）</a:t>
             </a:r>
           </a:p>
         </p:txBody>
@@ -21831,6 +22426,41 @@
               </a:defRPr>
             </a:pPr>
             <a:r>
+              <a:t>[国] 广州中交通信有限公司</a:t>
+            </a:r>
+          </a:p>
+        </p:txBody>
+      </p:sp>
+      <p:sp>
+        <p:nvSpPr>
+          <p:cNvPr id="61" name="TextBox 60"/>
+          <p:cNvSpPr txBox="1"/>
+          <p:nvPr/>
+        </p:nvSpPr>
+        <p:spPr>
+          <a:xfrm>
+            <a:off x="8138160" y="5138928"/>
+            <a:ext cx="3474720" cy="201168"/>
+          </a:xfrm>
+          <a:prstGeom prst="rect">
+            <a:avLst/>
+          </a:prstGeom>
+          <a:noFill/>
+        </p:spPr>
+        <p:txBody>
+          <a:bodyPr wrap="square">
+            <a:spAutoFit/>
+          </a:bodyPr>
+          <a:lstStyle/>
+          <a:p>
+            <a:pPr algn="l">
+              <a:defRPr sz="750" b="0">
+                <a:solidFill>
+                  <a:srgbClr val="D97706"/>
+                </a:solidFill>
+              </a:defRPr>
+            </a:pPr>
+            <a:r>
               <a:t>[国] 广州长运集团有限公司</a:t>
             </a:r>
           </a:p>
@@ -21838,13 +22468,13 @@
       </p:sp>
       <p:sp>
         <p:nvSpPr>
-          <p:cNvPr id="61" name="TextBox 60"/>
-          <p:cNvSpPr txBox="1"/>
-          <p:nvPr/>
-        </p:nvSpPr>
-        <p:spPr>
-          <a:xfrm>
-            <a:off x="8138160" y="5138928"/>
+          <p:cNvPr id="62" name="TextBox 61"/>
+          <p:cNvSpPr txBox="1"/>
+          <p:nvPr/>
+        </p:nvSpPr>
+        <p:spPr>
+          <a:xfrm>
+            <a:off x="8138160" y="5340096"/>
             <a:ext cx="3474720" cy="201168"/>
           </a:xfrm>
           <a:prstGeom prst="rect">
@@ -21867,41 +22497,6 @@
             </a:pPr>
             <a:r>
               <a:t>[国] 深圳高速公路集团股份有限公司</a:t>
-            </a:r>
-          </a:p>
-        </p:txBody>
-      </p:sp>
-      <p:sp>
-        <p:nvSpPr>
-          <p:cNvPr id="62" name="TextBox 61"/>
-          <p:cNvSpPr txBox="1"/>
-          <p:nvPr/>
-        </p:nvSpPr>
-        <p:spPr>
-          <a:xfrm>
-            <a:off x="8138160" y="5340096"/>
-            <a:ext cx="3474720" cy="201168"/>
-          </a:xfrm>
-          <a:prstGeom prst="rect">
-            <a:avLst/>
-          </a:prstGeom>
-          <a:noFill/>
-        </p:spPr>
-        <p:txBody>
-          <a:bodyPr wrap="square">
-            <a:spAutoFit/>
-          </a:bodyPr>
-          <a:lstStyle/>
-          <a:p>
-            <a:pPr algn="l">
-              <a:defRPr sz="750" b="0">
-                <a:solidFill>
-                  <a:srgbClr val="D97706"/>
-                </a:solidFill>
-              </a:defRPr>
-            </a:pPr>
-            <a:r>
-              <a:t>[国] 越秀（中国）交通基建投资有限公司</a:t>
             </a:r>
           </a:p>
         </p:txBody>
@@ -21936,7 +22531,7 @@
               </a:defRPr>
             </a:pPr>
             <a:r>
-              <a:t>...及其他 4 家</a:t>
+              <a:t>...及其他 7 家</a:t>
             </a:r>
           </a:p>
         </p:txBody>
@@ -22049,7 +22644,7 @@
               </a:defRPr>
             </a:pPr>
             <a:r>
-              <a:t>共 76 家企业/机构涉及此场景</a:t>
+              <a:t>共 92 家企业/机构涉及此场景</a:t>
             </a:r>
           </a:p>
         </p:txBody>
@@ -22101,7 +22696,7 @@
               </a:defRPr>
             </a:pPr>
             <a:r>
-              <a:t>🔧 上游技术（16家）</a:t>
+              <a:t>🔧 上游技术（29家）</a:t>
             </a:r>
           </a:p>
         </p:txBody>
@@ -22661,14 +23256,119 @@
               </a:defRPr>
             </a:pPr>
             <a:r>
-              <a:t>[研] 华南理工大学智能交通系统与物流技术研究所</a:t>
-            </a:r>
-          </a:p>
-        </p:txBody>
-      </p:sp>
-      <p:sp>
-        <p:nvSpPr>
-          <p:cNvPr id="21" name="Rectangle 20"/>
+              <a:t>[研] 东莞理工学院生态环境与建筑工程学院</a:t>
+            </a:r>
+          </a:p>
+        </p:txBody>
+      </p:sp>
+      <p:sp>
+        <p:nvSpPr>
+          <p:cNvPr id="21" name="TextBox 20"/>
+          <p:cNvSpPr txBox="1"/>
+          <p:nvPr/>
+        </p:nvSpPr>
+        <p:spPr>
+          <a:xfrm>
+            <a:off x="457200" y="5138928"/>
+            <a:ext cx="3474720" cy="201168"/>
+          </a:xfrm>
+          <a:prstGeom prst="rect">
+            <a:avLst/>
+          </a:prstGeom>
+          <a:noFill/>
+        </p:spPr>
+        <p:txBody>
+          <a:bodyPr wrap="square">
+            <a:spAutoFit/>
+          </a:bodyPr>
+          <a:lstStyle/>
+          <a:p>
+            <a:pPr algn="l">
+              <a:defRPr sz="750" b="0">
+                <a:solidFill>
+                  <a:srgbClr val="059669"/>
+                </a:solidFill>
+              </a:defRPr>
+            </a:pPr>
+            <a:r>
+              <a:t>[研] 中山大学智能交通研究中心</a:t>
+            </a:r>
+          </a:p>
+        </p:txBody>
+      </p:sp>
+      <p:sp>
+        <p:nvSpPr>
+          <p:cNvPr id="22" name="TextBox 21"/>
+          <p:cNvSpPr txBox="1"/>
+          <p:nvPr/>
+        </p:nvSpPr>
+        <p:spPr>
+          <a:xfrm>
+            <a:off x="457200" y="5340096"/>
+            <a:ext cx="3474720" cy="201168"/>
+          </a:xfrm>
+          <a:prstGeom prst="rect">
+            <a:avLst/>
+          </a:prstGeom>
+          <a:noFill/>
+        </p:spPr>
+        <p:txBody>
+          <a:bodyPr wrap="square">
+            <a:spAutoFit/>
+          </a:bodyPr>
+          <a:lstStyle/>
+          <a:p>
+            <a:pPr algn="l">
+              <a:defRPr sz="750" b="0">
+                <a:solidFill>
+                  <a:srgbClr val="059669"/>
+                </a:solidFill>
+              </a:defRPr>
+            </a:pPr>
+            <a:r>
+              <a:t>[研] 五邑大学土木建筑学院</a:t>
+            </a:r>
+          </a:p>
+        </p:txBody>
+      </p:sp>
+      <p:sp>
+        <p:nvSpPr>
+          <p:cNvPr id="23" name="TextBox 22"/>
+          <p:cNvSpPr txBox="1"/>
+          <p:nvPr/>
+        </p:nvSpPr>
+        <p:spPr>
+          <a:xfrm>
+            <a:off x="457200" y="5541264"/>
+            <a:ext cx="3474720" cy="182880"/>
+          </a:xfrm>
+          <a:prstGeom prst="rect">
+            <a:avLst/>
+          </a:prstGeom>
+          <a:noFill/>
+        </p:spPr>
+        <p:txBody>
+          <a:bodyPr wrap="square">
+            <a:spAutoFit/>
+          </a:bodyPr>
+          <a:lstStyle/>
+          <a:p>
+            <a:pPr algn="l">
+              <a:defRPr sz="700" b="0">
+                <a:solidFill>
+                  <a:srgbClr val="94A3B8"/>
+                </a:solidFill>
+              </a:defRPr>
+            </a:pPr>
+            <a:r>
+              <a:t>...及其他 11 家</a:t>
+            </a:r>
+          </a:p>
+        </p:txBody>
+      </p:sp>
+      <p:sp>
+        <p:nvSpPr>
+          <p:cNvPr id="24" name="Rectangle 23"/>
           <p:cNvSpPr/>
           <p:nvPr/>
         </p:nvSpPr>
@@ -22713,14 +23413,14 @@
               </a:defRPr>
             </a:pPr>
             <a:r>
-              <a:t>⚙️ 中游集成（50家）</a:t>
-            </a:r>
-          </a:p>
-        </p:txBody>
-      </p:sp>
-      <p:sp>
-        <p:nvSpPr>
-          <p:cNvPr id="22" name="TextBox 21"/>
+              <a:t>⚙️ 中游集成（53家）</a:t>
+            </a:r>
+          </a:p>
+        </p:txBody>
+      </p:sp>
+      <p:sp>
+        <p:nvSpPr>
+          <p:cNvPr id="25" name="TextBox 24"/>
           <p:cNvSpPr txBox="1"/>
           <p:nvPr/>
         </p:nvSpPr>
@@ -22755,7 +23455,7 @@
       </p:sp>
       <p:sp>
         <p:nvSpPr>
-          <p:cNvPr id="23" name="TextBox 22"/>
+          <p:cNvPr id="26" name="TextBox 25"/>
           <p:cNvSpPr txBox="1"/>
           <p:nvPr/>
         </p:nvSpPr>
@@ -22790,7 +23490,7 @@
       </p:sp>
       <p:sp>
         <p:nvSpPr>
-          <p:cNvPr id="24" name="TextBox 23"/>
+          <p:cNvPr id="27" name="TextBox 26"/>
           <p:cNvSpPr txBox="1"/>
           <p:nvPr/>
         </p:nvSpPr>
@@ -22825,7 +23525,7 @@
       </p:sp>
       <p:sp>
         <p:nvSpPr>
-          <p:cNvPr id="25" name="TextBox 24"/>
+          <p:cNvPr id="28" name="TextBox 27"/>
           <p:cNvSpPr txBox="1"/>
           <p:nvPr/>
         </p:nvSpPr>
@@ -22860,7 +23560,7 @@
       </p:sp>
       <p:sp>
         <p:nvSpPr>
-          <p:cNvPr id="26" name="TextBox 25"/>
+          <p:cNvPr id="29" name="TextBox 28"/>
           <p:cNvSpPr txBox="1"/>
           <p:nvPr/>
         </p:nvSpPr>
@@ -22888,6 +23588,76 @@
               </a:defRPr>
             </a:pPr>
             <a:r>
+              <a:t>[国] 广州市城市规划勘测设计研究院有限公司</a:t>
+            </a:r>
+          </a:p>
+        </p:txBody>
+      </p:sp>
+      <p:sp>
+        <p:nvSpPr>
+          <p:cNvPr id="30" name="TextBox 29"/>
+          <p:cNvSpPr txBox="1"/>
+          <p:nvPr/>
+        </p:nvSpPr>
+        <p:spPr>
+          <a:xfrm>
+            <a:off x="4297680" y="2926080"/>
+            <a:ext cx="3474720" cy="201168"/>
+          </a:xfrm>
+          <a:prstGeom prst="rect">
+            <a:avLst/>
+          </a:prstGeom>
+          <a:noFill/>
+        </p:spPr>
+        <p:txBody>
+          <a:bodyPr wrap="square">
+            <a:spAutoFit/>
+          </a:bodyPr>
+          <a:lstStyle/>
+          <a:p>
+            <a:pPr algn="l">
+              <a:defRPr sz="750" b="0">
+                <a:solidFill>
+                  <a:srgbClr val="D97706"/>
+                </a:solidFill>
+              </a:defRPr>
+            </a:pPr>
+            <a:r>
+              <a:t>[国] 广州羊城通有限公司</a:t>
+            </a:r>
+          </a:p>
+        </p:txBody>
+      </p:sp>
+      <p:sp>
+        <p:nvSpPr>
+          <p:cNvPr id="31" name="TextBox 30"/>
+          <p:cNvSpPr txBox="1"/>
+          <p:nvPr/>
+        </p:nvSpPr>
+        <p:spPr>
+          <a:xfrm>
+            <a:off x="4297680" y="3127248"/>
+            <a:ext cx="3474720" cy="201168"/>
+          </a:xfrm>
+          <a:prstGeom prst="rect">
+            <a:avLst/>
+          </a:prstGeom>
+          <a:noFill/>
+        </p:spPr>
+        <p:txBody>
+          <a:bodyPr wrap="square">
+            <a:spAutoFit/>
+          </a:bodyPr>
+          <a:lstStyle/>
+          <a:p>
+            <a:pPr algn="l">
+              <a:defRPr sz="750" b="0">
+                <a:solidFill>
+                  <a:srgbClr val="D97706"/>
+                </a:solidFill>
+              </a:defRPr>
+            </a:pPr>
+            <a:r>
               <a:t>[国] 深圳市城市交通规划设计研究中心股份有限公司</a:t>
             </a:r>
           </a:p>
@@ -22895,13 +23665,13 @@
       </p:sp>
       <p:sp>
         <p:nvSpPr>
-          <p:cNvPr id="27" name="TextBox 26"/>
-          <p:cNvSpPr txBox="1"/>
-          <p:nvPr/>
-        </p:nvSpPr>
-        <p:spPr>
-          <a:xfrm>
-            <a:off x="4297680" y="2926080"/>
+          <p:cNvPr id="32" name="TextBox 31"/>
+          <p:cNvSpPr txBox="1"/>
+          <p:nvPr/>
+        </p:nvSpPr>
+        <p:spPr>
+          <a:xfrm>
+            <a:off x="4297680" y="3328416"/>
             <a:ext cx="3474720" cy="201168"/>
           </a:xfrm>
           <a:prstGeom prst="rect">
@@ -22930,13 +23700,13 @@
       </p:sp>
       <p:sp>
         <p:nvSpPr>
-          <p:cNvPr id="28" name="TextBox 27"/>
-          <p:cNvSpPr txBox="1"/>
-          <p:nvPr/>
-        </p:nvSpPr>
-        <p:spPr>
-          <a:xfrm>
-            <a:off x="4297680" y="3127248"/>
+          <p:cNvPr id="33" name="TextBox 32"/>
+          <p:cNvSpPr txBox="1"/>
+          <p:nvPr/>
+        </p:nvSpPr>
+        <p:spPr>
+          <a:xfrm>
+            <a:off x="4297680" y="3529584"/>
             <a:ext cx="3474720" cy="201168"/>
           </a:xfrm>
           <a:prstGeom prst="rect">
@@ -22965,13 +23735,13 @@
       </p:sp>
       <p:sp>
         <p:nvSpPr>
-          <p:cNvPr id="29" name="TextBox 28"/>
-          <p:cNvSpPr txBox="1"/>
-          <p:nvPr/>
-        </p:nvSpPr>
-        <p:spPr>
-          <a:xfrm>
-            <a:off x="4297680" y="3328416"/>
+          <p:cNvPr id="34" name="TextBox 33"/>
+          <p:cNvSpPr txBox="1"/>
+          <p:nvPr/>
+        </p:nvSpPr>
+        <p:spPr>
+          <a:xfrm>
+            <a:off x="4297680" y="3730752"/>
             <a:ext cx="3474720" cy="201168"/>
           </a:xfrm>
           <a:prstGeom prst="rect">
@@ -23000,13 +23770,13 @@
       </p:sp>
       <p:sp>
         <p:nvSpPr>
-          <p:cNvPr id="30" name="TextBox 29"/>
-          <p:cNvSpPr txBox="1"/>
-          <p:nvPr/>
-        </p:nvSpPr>
-        <p:spPr>
-          <a:xfrm>
-            <a:off x="4297680" y="3529584"/>
+          <p:cNvPr id="35" name="TextBox 34"/>
+          <p:cNvSpPr txBox="1"/>
+          <p:nvPr/>
+        </p:nvSpPr>
+        <p:spPr>
+          <a:xfrm>
+            <a:off x="4297680" y="3931920"/>
             <a:ext cx="3474720" cy="201168"/>
           </a:xfrm>
           <a:prstGeom prst="rect">
@@ -23035,13 +23805,13 @@
       </p:sp>
       <p:sp>
         <p:nvSpPr>
-          <p:cNvPr id="31" name="TextBox 30"/>
-          <p:cNvSpPr txBox="1"/>
-          <p:nvPr/>
-        </p:nvSpPr>
-        <p:spPr>
-          <a:xfrm>
-            <a:off x="4297680" y="3730752"/>
+          <p:cNvPr id="36" name="TextBox 35"/>
+          <p:cNvSpPr txBox="1"/>
+          <p:nvPr/>
+        </p:nvSpPr>
+        <p:spPr>
+          <a:xfrm>
+            <a:off x="4297680" y="4133088"/>
             <a:ext cx="3474720" cy="201168"/>
           </a:xfrm>
           <a:prstGeom prst="rect">
@@ -23070,13 +23840,13 @@
       </p:sp>
       <p:sp>
         <p:nvSpPr>
-          <p:cNvPr id="32" name="TextBox 31"/>
-          <p:cNvSpPr txBox="1"/>
-          <p:nvPr/>
-        </p:nvSpPr>
-        <p:spPr>
-          <a:xfrm>
-            <a:off x="4297680" y="3931920"/>
+          <p:cNvPr id="37" name="TextBox 36"/>
+          <p:cNvSpPr txBox="1"/>
+          <p:nvPr/>
+        </p:nvSpPr>
+        <p:spPr>
+          <a:xfrm>
+            <a:off x="4297680" y="4334256"/>
             <a:ext cx="3474720" cy="201168"/>
           </a:xfrm>
           <a:prstGeom prst="rect">
@@ -23105,13 +23875,13 @@
       </p:sp>
       <p:sp>
         <p:nvSpPr>
-          <p:cNvPr id="33" name="TextBox 32"/>
-          <p:cNvSpPr txBox="1"/>
-          <p:nvPr/>
-        </p:nvSpPr>
-        <p:spPr>
-          <a:xfrm>
-            <a:off x="4297680" y="4133088"/>
+          <p:cNvPr id="38" name="TextBox 37"/>
+          <p:cNvSpPr txBox="1"/>
+          <p:nvPr/>
+        </p:nvSpPr>
+        <p:spPr>
+          <a:xfrm>
+            <a:off x="4297680" y="4535424"/>
             <a:ext cx="3474720" cy="201168"/>
           </a:xfrm>
           <a:prstGeom prst="rect">
@@ -23140,13 +23910,13 @@
       </p:sp>
       <p:sp>
         <p:nvSpPr>
-          <p:cNvPr id="34" name="TextBox 33"/>
-          <p:cNvSpPr txBox="1"/>
-          <p:nvPr/>
-        </p:nvSpPr>
-        <p:spPr>
-          <a:xfrm>
-            <a:off x="4297680" y="4334256"/>
+          <p:cNvPr id="39" name="TextBox 38"/>
+          <p:cNvSpPr txBox="1"/>
+          <p:nvPr/>
+        </p:nvSpPr>
+        <p:spPr>
+          <a:xfrm>
+            <a:off x="4297680" y="4736592"/>
             <a:ext cx="3474720" cy="201168"/>
           </a:xfrm>
           <a:prstGeom prst="rect">
@@ -23175,13 +23945,13 @@
       </p:sp>
       <p:sp>
         <p:nvSpPr>
-          <p:cNvPr id="35" name="TextBox 34"/>
-          <p:cNvSpPr txBox="1"/>
-          <p:nvPr/>
-        </p:nvSpPr>
-        <p:spPr>
-          <a:xfrm>
-            <a:off x="4297680" y="4535424"/>
+          <p:cNvPr id="40" name="TextBox 39"/>
+          <p:cNvSpPr txBox="1"/>
+          <p:nvPr/>
+        </p:nvSpPr>
+        <p:spPr>
+          <a:xfrm>
+            <a:off x="4297680" y="4937760"/>
             <a:ext cx="3474720" cy="201168"/>
           </a:xfrm>
           <a:prstGeom prst="rect">
@@ -23210,13 +23980,13 @@
       </p:sp>
       <p:sp>
         <p:nvSpPr>
-          <p:cNvPr id="36" name="TextBox 35"/>
-          <p:cNvSpPr txBox="1"/>
-          <p:nvPr/>
-        </p:nvSpPr>
-        <p:spPr>
-          <a:xfrm>
-            <a:off x="4297680" y="4736592"/>
+          <p:cNvPr id="41" name="TextBox 40"/>
+          <p:cNvSpPr txBox="1"/>
+          <p:nvPr/>
+        </p:nvSpPr>
+        <p:spPr>
+          <a:xfrm>
+            <a:off x="4297680" y="5138928"/>
             <a:ext cx="3474720" cy="201168"/>
           </a:xfrm>
           <a:prstGeom prst="rect">
@@ -23245,13 +24015,13 @@
       </p:sp>
       <p:sp>
         <p:nvSpPr>
-          <p:cNvPr id="37" name="TextBox 36"/>
-          <p:cNvSpPr txBox="1"/>
-          <p:nvPr/>
-        </p:nvSpPr>
-        <p:spPr>
-          <a:xfrm>
-            <a:off x="4297680" y="4937760"/>
+          <p:cNvPr id="42" name="TextBox 41"/>
+          <p:cNvSpPr txBox="1"/>
+          <p:nvPr/>
+        </p:nvSpPr>
+        <p:spPr>
+          <a:xfrm>
+            <a:off x="4297680" y="5340096"/>
             <a:ext cx="3474720" cy="201168"/>
           </a:xfrm>
           <a:prstGeom prst="rect">
@@ -23280,77 +24050,7 @@
       </p:sp>
       <p:sp>
         <p:nvSpPr>
-          <p:cNvPr id="38" name="TextBox 37"/>
-          <p:cNvSpPr txBox="1"/>
-          <p:nvPr/>
-        </p:nvSpPr>
-        <p:spPr>
-          <a:xfrm>
-            <a:off x="4297680" y="5138928"/>
-            <a:ext cx="3474720" cy="201168"/>
-          </a:xfrm>
-          <a:prstGeom prst="rect">
-            <a:avLst/>
-          </a:prstGeom>
-          <a:noFill/>
-        </p:spPr>
-        <p:txBody>
-          <a:bodyPr wrap="square">
-            <a:spAutoFit/>
-          </a:bodyPr>
-          <a:lstStyle/>
-          <a:p>
-            <a:pPr algn="l">
-              <a:defRPr sz="750" b="0">
-                <a:solidFill>
-                  <a:srgbClr val="0891B2"/>
-                </a:solidFill>
-              </a:defRPr>
-            </a:pPr>
-            <a:r>
-              <a:t>[民] 广东瀚信科技有限公司</a:t>
-            </a:r>
-          </a:p>
-        </p:txBody>
-      </p:sp>
-      <p:sp>
-        <p:nvSpPr>
-          <p:cNvPr id="39" name="TextBox 38"/>
-          <p:cNvSpPr txBox="1"/>
-          <p:nvPr/>
-        </p:nvSpPr>
-        <p:spPr>
-          <a:xfrm>
-            <a:off x="4297680" y="5340096"/>
-            <a:ext cx="3474720" cy="201168"/>
-          </a:xfrm>
-          <a:prstGeom prst="rect">
-            <a:avLst/>
-          </a:prstGeom>
-          <a:noFill/>
-        </p:spPr>
-        <p:txBody>
-          <a:bodyPr wrap="square">
-            <a:spAutoFit/>
-          </a:bodyPr>
-          <a:lstStyle/>
-          <a:p>
-            <a:pPr algn="l">
-              <a:defRPr sz="750" b="0">
-                <a:solidFill>
-                  <a:srgbClr val="0891B2"/>
-                </a:solidFill>
-              </a:defRPr>
-            </a:pPr>
-            <a:r>
-              <a:t>[民] 广东瀚宇技术有限公司</a:t>
-            </a:r>
-          </a:p>
-        </p:txBody>
-      </p:sp>
-      <p:sp>
-        <p:nvSpPr>
-          <p:cNvPr id="40" name="TextBox 39"/>
+          <p:cNvPr id="43" name="TextBox 42"/>
           <p:cNvSpPr txBox="1"/>
           <p:nvPr/>
         </p:nvSpPr>
@@ -23378,14 +24078,14 @@
               </a:defRPr>
             </a:pPr>
             <a:r>
-              <a:t>...及其他 32 家</a:t>
-            </a:r>
-          </a:p>
-        </p:txBody>
-      </p:sp>
-      <p:sp>
-        <p:nvSpPr>
-          <p:cNvPr id="41" name="Rectangle 40"/>
+              <a:t>...及其他 35 家</a:t>
+            </a:r>
+          </a:p>
+        </p:txBody>
+      </p:sp>
+      <p:sp>
+        <p:nvSpPr>
+          <p:cNvPr id="44" name="Rectangle 43"/>
           <p:cNvSpPr/>
           <p:nvPr/>
         </p:nvSpPr>
@@ -23437,7 +24137,7 @@
       </p:sp>
       <p:sp>
         <p:nvSpPr>
-          <p:cNvPr id="42" name="TextBox 41"/>
+          <p:cNvPr id="45" name="TextBox 44"/>
           <p:cNvSpPr txBox="1"/>
           <p:nvPr/>
         </p:nvSpPr>
@@ -23472,7 +24172,7 @@
       </p:sp>
       <p:sp>
         <p:nvSpPr>
-          <p:cNvPr id="43" name="TextBox 42"/>
+          <p:cNvPr id="46" name="TextBox 45"/>
           <p:cNvSpPr txBox="1"/>
           <p:nvPr/>
         </p:nvSpPr>
@@ -23507,7 +24207,7 @@
       </p:sp>
       <p:sp>
         <p:nvSpPr>
-          <p:cNvPr id="44" name="TextBox 43"/>
+          <p:cNvPr id="47" name="TextBox 46"/>
           <p:cNvSpPr txBox="1"/>
           <p:nvPr/>
         </p:nvSpPr>
@@ -23542,7 +24242,7 @@
       </p:sp>
       <p:sp>
         <p:nvSpPr>
-          <p:cNvPr id="45" name="TextBox 44"/>
+          <p:cNvPr id="48" name="TextBox 47"/>
           <p:cNvSpPr txBox="1"/>
           <p:nvPr/>
         </p:nvSpPr>
@@ -23577,7 +24277,7 @@
       </p:sp>
       <p:sp>
         <p:nvSpPr>
-          <p:cNvPr id="46" name="TextBox 45"/>
+          <p:cNvPr id="49" name="TextBox 48"/>
           <p:cNvSpPr txBox="1"/>
           <p:nvPr/>
         </p:nvSpPr>
@@ -23612,7 +24312,7 @@
       </p:sp>
       <p:sp>
         <p:nvSpPr>
-          <p:cNvPr id="47" name="TextBox 46"/>
+          <p:cNvPr id="50" name="TextBox 49"/>
           <p:cNvSpPr txBox="1"/>
           <p:nvPr/>
         </p:nvSpPr>
@@ -23647,7 +24347,7 @@
       </p:sp>
       <p:sp>
         <p:nvSpPr>
-          <p:cNvPr id="48" name="TextBox 47"/>
+          <p:cNvPr id="51" name="TextBox 50"/>
           <p:cNvSpPr txBox="1"/>
           <p:nvPr/>
         </p:nvSpPr>
@@ -23682,7 +24382,7 @@
       </p:sp>
       <p:sp>
         <p:nvSpPr>
-          <p:cNvPr id="49" name="TextBox 48"/>
+          <p:cNvPr id="52" name="TextBox 51"/>
           <p:cNvSpPr txBox="1"/>
           <p:nvPr/>
         </p:nvSpPr>
@@ -23717,7 +24417,7 @@
       </p:sp>
       <p:sp>
         <p:nvSpPr>
-          <p:cNvPr id="50" name="TextBox 49"/>
+          <p:cNvPr id="53" name="TextBox 52"/>
           <p:cNvSpPr txBox="1"/>
           <p:nvPr/>
         </p:nvSpPr>
@@ -23752,7 +24452,7 @@
       </p:sp>
       <p:sp>
         <p:nvSpPr>
-          <p:cNvPr id="51" name="TextBox 50"/>
+          <p:cNvPr id="54" name="TextBox 53"/>
           <p:cNvSpPr txBox="1"/>
           <p:nvPr/>
         </p:nvSpPr>
@@ -23893,7 +24593,7 @@
               </a:defRPr>
             </a:pPr>
             <a:r>
-              <a:t>共 63 家企业/机构涉及此场景</a:t>
+              <a:t>共 73 家企业/机构涉及此场景</a:t>
             </a:r>
           </a:p>
         </p:txBody>
@@ -23945,7 +24645,7 @@
               </a:defRPr>
             </a:pPr>
             <a:r>
-              <a:t>🔧 上游技术（46家）</a:t>
+              <a:t>🔧 上游技术（54家）</a:t>
             </a:r>
           </a:p>
         </p:txBody>
@@ -24610,7 +25310,7 @@
               </a:defRPr>
             </a:pPr>
             <a:r>
-              <a:t>...及其他 28 家</a:t>
+              <a:t>...及其他 36 家</a:t>
             </a:r>
           </a:p>
         </p:txBody>
@@ -24662,7 +25362,7 @@
               </a:defRPr>
             </a:pPr>
             <a:r>
-              <a:t>⚙️ 中游集成（15家）</a:t>
+              <a:t>⚙️ 中游集成（17家）</a:t>
             </a:r>
           </a:p>
         </p:txBody>
@@ -24727,11 +25427,81 @@
             <a:pPr algn="l">
               <a:defRPr sz="750" b="0">
                 <a:solidFill>
+                  <a:srgbClr val="D97706"/>
+                </a:solidFill>
+              </a:defRPr>
+            </a:pPr>
+            <a:r>
+              <a:t>[国] 广州广电运通智能科技有限公司</a:t>
+            </a:r>
+          </a:p>
+        </p:txBody>
+      </p:sp>
+      <p:sp>
+        <p:nvSpPr>
+          <p:cNvPr id="27" name="TextBox 26"/>
+          <p:cNvSpPr txBox="1"/>
+          <p:nvPr/>
+        </p:nvSpPr>
+        <p:spPr>
+          <a:xfrm>
+            <a:off x="4297680" y="2322576"/>
+            <a:ext cx="3474720" cy="201168"/>
+          </a:xfrm>
+          <a:prstGeom prst="rect">
+            <a:avLst/>
+          </a:prstGeom>
+          <a:noFill/>
+        </p:spPr>
+        <p:txBody>
+          <a:bodyPr wrap="square">
+            <a:spAutoFit/>
+          </a:bodyPr>
+          <a:lstStyle/>
+          <a:p>
+            <a:pPr algn="l">
+              <a:defRPr sz="750" b="0">
+                <a:solidFill>
                   <a:srgbClr val="0891B2"/>
                 </a:solidFill>
               </a:defRPr>
             </a:pPr>
             <a:r>
+              <a:t>[民] 北京超图软件股份有限公司广州分公司</a:t>
+            </a:r>
+          </a:p>
+        </p:txBody>
+      </p:sp>
+      <p:sp>
+        <p:nvSpPr>
+          <p:cNvPr id="28" name="TextBox 27"/>
+          <p:cNvSpPr txBox="1"/>
+          <p:nvPr/>
+        </p:nvSpPr>
+        <p:spPr>
+          <a:xfrm>
+            <a:off x="4297680" y="2523744"/>
+            <a:ext cx="3474720" cy="201168"/>
+          </a:xfrm>
+          <a:prstGeom prst="rect">
+            <a:avLst/>
+          </a:prstGeom>
+          <a:noFill/>
+        </p:spPr>
+        <p:txBody>
+          <a:bodyPr wrap="square">
+            <a:spAutoFit/>
+          </a:bodyPr>
+          <a:lstStyle/>
+          <a:p>
+            <a:pPr algn="l">
+              <a:defRPr sz="750" b="0">
+                <a:solidFill>
+                  <a:srgbClr val="0891B2"/>
+                </a:solidFill>
+              </a:defRPr>
+            </a:pPr>
+            <a:r>
               <a:t>[民] 同盾科技有限公司</a:t>
             </a:r>
           </a:p>
@@ -24739,13 +25509,13 @@
       </p:sp>
       <p:sp>
         <p:nvSpPr>
-          <p:cNvPr id="27" name="TextBox 26"/>
-          <p:cNvSpPr txBox="1"/>
-          <p:nvPr/>
-        </p:nvSpPr>
-        <p:spPr>
-          <a:xfrm>
-            <a:off x="4297680" y="2322576"/>
+          <p:cNvPr id="29" name="TextBox 28"/>
+          <p:cNvSpPr txBox="1"/>
+          <p:nvPr/>
+        </p:nvSpPr>
+        <p:spPr>
+          <a:xfrm>
+            <a:off x="4297680" y="2724912"/>
             <a:ext cx="3474720" cy="201168"/>
           </a:xfrm>
           <a:prstGeom prst="rect">
@@ -24774,13 +25544,13 @@
       </p:sp>
       <p:sp>
         <p:nvSpPr>
-          <p:cNvPr id="28" name="TextBox 27"/>
-          <p:cNvSpPr txBox="1"/>
-          <p:nvPr/>
-        </p:nvSpPr>
-        <p:spPr>
-          <a:xfrm>
-            <a:off x="4297680" y="2523744"/>
+          <p:cNvPr id="30" name="TextBox 29"/>
+          <p:cNvSpPr txBox="1"/>
+          <p:nvPr/>
+        </p:nvSpPr>
+        <p:spPr>
+          <a:xfrm>
+            <a:off x="4297680" y="2926080"/>
             <a:ext cx="3474720" cy="201168"/>
           </a:xfrm>
           <a:prstGeom prst="rect">
@@ -24809,13 +25579,13 @@
       </p:sp>
       <p:sp>
         <p:nvSpPr>
-          <p:cNvPr id="29" name="TextBox 28"/>
-          <p:cNvSpPr txBox="1"/>
-          <p:nvPr/>
-        </p:nvSpPr>
-        <p:spPr>
-          <a:xfrm>
-            <a:off x="4297680" y="2724912"/>
+          <p:cNvPr id="31" name="TextBox 30"/>
+          <p:cNvSpPr txBox="1"/>
+          <p:nvPr/>
+        </p:nvSpPr>
+        <p:spPr>
+          <a:xfrm>
+            <a:off x="4297680" y="3127248"/>
             <a:ext cx="3474720" cy="201168"/>
           </a:xfrm>
           <a:prstGeom prst="rect">
@@ -24844,13 +25614,13 @@
       </p:sp>
       <p:sp>
         <p:nvSpPr>
-          <p:cNvPr id="30" name="TextBox 29"/>
-          <p:cNvSpPr txBox="1"/>
-          <p:nvPr/>
-        </p:nvSpPr>
-        <p:spPr>
-          <a:xfrm>
-            <a:off x="4297680" y="2926080"/>
+          <p:cNvPr id="32" name="TextBox 31"/>
+          <p:cNvSpPr txBox="1"/>
+          <p:nvPr/>
+        </p:nvSpPr>
+        <p:spPr>
+          <a:xfrm>
+            <a:off x="4297680" y="3328416"/>
             <a:ext cx="3474720" cy="201168"/>
           </a:xfrm>
           <a:prstGeom prst="rect">
@@ -24879,13 +25649,13 @@
       </p:sp>
       <p:sp>
         <p:nvSpPr>
-          <p:cNvPr id="31" name="TextBox 30"/>
-          <p:cNvSpPr txBox="1"/>
-          <p:nvPr/>
-        </p:nvSpPr>
-        <p:spPr>
-          <a:xfrm>
-            <a:off x="4297680" y="3127248"/>
+          <p:cNvPr id="33" name="TextBox 32"/>
+          <p:cNvSpPr txBox="1"/>
+          <p:nvPr/>
+        </p:nvSpPr>
+        <p:spPr>
+          <a:xfrm>
+            <a:off x="4297680" y="3529584"/>
             <a:ext cx="3474720" cy="201168"/>
           </a:xfrm>
           <a:prstGeom prst="rect">
@@ -24914,13 +25684,13 @@
       </p:sp>
       <p:sp>
         <p:nvSpPr>
-          <p:cNvPr id="32" name="TextBox 31"/>
-          <p:cNvSpPr txBox="1"/>
-          <p:nvPr/>
-        </p:nvSpPr>
-        <p:spPr>
-          <a:xfrm>
-            <a:off x="4297680" y="3328416"/>
+          <p:cNvPr id="34" name="TextBox 33"/>
+          <p:cNvSpPr txBox="1"/>
+          <p:nvPr/>
+        </p:nvSpPr>
+        <p:spPr>
+          <a:xfrm>
+            <a:off x="4297680" y="3730752"/>
             <a:ext cx="3474720" cy="201168"/>
           </a:xfrm>
           <a:prstGeom prst="rect">
@@ -24949,13 +25719,13 @@
       </p:sp>
       <p:sp>
         <p:nvSpPr>
-          <p:cNvPr id="33" name="TextBox 32"/>
-          <p:cNvSpPr txBox="1"/>
-          <p:nvPr/>
-        </p:nvSpPr>
-        <p:spPr>
-          <a:xfrm>
-            <a:off x="4297680" y="3529584"/>
+          <p:cNvPr id="35" name="TextBox 34"/>
+          <p:cNvSpPr txBox="1"/>
+          <p:nvPr/>
+        </p:nvSpPr>
+        <p:spPr>
+          <a:xfrm>
+            <a:off x="4297680" y="3931920"/>
             <a:ext cx="3474720" cy="201168"/>
           </a:xfrm>
           <a:prstGeom prst="rect">
@@ -24977,6 +25747,41 @@
               </a:defRPr>
             </a:pPr>
             <a:r>
+              <a:t>[民] 广州学塾加软件科技有限公司</a:t>
+            </a:r>
+          </a:p>
+        </p:txBody>
+      </p:sp>
+      <p:sp>
+        <p:nvSpPr>
+          <p:cNvPr id="36" name="TextBox 35"/>
+          <p:cNvSpPr txBox="1"/>
+          <p:nvPr/>
+        </p:nvSpPr>
+        <p:spPr>
+          <a:xfrm>
+            <a:off x="4297680" y="4133088"/>
+            <a:ext cx="3474720" cy="201168"/>
+          </a:xfrm>
+          <a:prstGeom prst="rect">
+            <a:avLst/>
+          </a:prstGeom>
+          <a:noFill/>
+        </p:spPr>
+        <p:txBody>
+          <a:bodyPr wrap="square">
+            <a:spAutoFit/>
+          </a:bodyPr>
+          <a:lstStyle/>
+          <a:p>
+            <a:pPr algn="l">
+              <a:defRPr sz="750" b="0">
+                <a:solidFill>
+                  <a:srgbClr val="0891B2"/>
+                </a:solidFill>
+              </a:defRPr>
+            </a:pPr>
+            <a:r>
               <a:t>[民] 广州市学塾加软件科技有限公司</a:t>
             </a:r>
           </a:p>
@@ -24984,13 +25789,13 @@
       </p:sp>
       <p:sp>
         <p:nvSpPr>
-          <p:cNvPr id="34" name="TextBox 33"/>
-          <p:cNvSpPr txBox="1"/>
-          <p:nvPr/>
-        </p:nvSpPr>
-        <p:spPr>
-          <a:xfrm>
-            <a:off x="4297680" y="3730752"/>
+          <p:cNvPr id="37" name="TextBox 36"/>
+          <p:cNvSpPr txBox="1"/>
+          <p:nvPr/>
+        </p:nvSpPr>
+        <p:spPr>
+          <a:xfrm>
+            <a:off x="4297680" y="4334256"/>
             <a:ext cx="3474720" cy="201168"/>
           </a:xfrm>
           <a:prstGeom prst="rect">
@@ -25012,20 +25817,20 @@
               </a:defRPr>
             </a:pPr>
             <a:r>
-              <a:t>[民] 广州广电运通智能科技有限公司</a:t>
-            </a:r>
-          </a:p>
-        </p:txBody>
-      </p:sp>
-      <p:sp>
-        <p:nvSpPr>
-          <p:cNvPr id="35" name="TextBox 34"/>
-          <p:cNvSpPr txBox="1"/>
-          <p:nvPr/>
-        </p:nvSpPr>
-        <p:spPr>
-          <a:xfrm>
-            <a:off x="4297680" y="3931920"/>
+              <a:t>[民] 智行智能交通科技（广州）有限公司</a:t>
+            </a:r>
+          </a:p>
+        </p:txBody>
+      </p:sp>
+      <p:sp>
+        <p:nvSpPr>
+          <p:cNvPr id="38" name="TextBox 37"/>
+          <p:cNvSpPr txBox="1"/>
+          <p:nvPr/>
+        </p:nvSpPr>
+        <p:spPr>
+          <a:xfrm>
+            <a:off x="4297680" y="4535424"/>
             <a:ext cx="3474720" cy="201168"/>
           </a:xfrm>
           <a:prstGeom prst="rect">
@@ -25047,20 +25852,20 @@
               </a:defRPr>
             </a:pPr>
             <a:r>
-              <a:t>[民] 智行智能交通科技（广州）有限公司</a:t>
-            </a:r>
-          </a:p>
-        </p:txBody>
-      </p:sp>
-      <p:sp>
-        <p:nvSpPr>
-          <p:cNvPr id="36" name="TextBox 35"/>
-          <p:cNvSpPr txBox="1"/>
-          <p:nvPr/>
-        </p:nvSpPr>
-        <p:spPr>
-          <a:xfrm>
-            <a:off x="4297680" y="4133088"/>
+              <a:t>[民] 浩鲸云计算科技股份有限公司</a:t>
+            </a:r>
+          </a:p>
+        </p:txBody>
+      </p:sp>
+      <p:sp>
+        <p:nvSpPr>
+          <p:cNvPr id="39" name="TextBox 38"/>
+          <p:cNvSpPr txBox="1"/>
+          <p:nvPr/>
+        </p:nvSpPr>
+        <p:spPr>
+          <a:xfrm>
+            <a:off x="4297680" y="4736592"/>
             <a:ext cx="3474720" cy="201168"/>
           </a:xfrm>
           <a:prstGeom prst="rect">
@@ -25082,20 +25887,20 @@
               </a:defRPr>
             </a:pPr>
             <a:r>
-              <a:t>[民] 浩鲸云计算科技股份有限公司</a:t>
-            </a:r>
-          </a:p>
-        </p:txBody>
-      </p:sp>
-      <p:sp>
-        <p:nvSpPr>
-          <p:cNvPr id="37" name="TextBox 36"/>
-          <p:cNvSpPr txBox="1"/>
-          <p:nvPr/>
-        </p:nvSpPr>
-        <p:spPr>
-          <a:xfrm>
-            <a:off x="4297680" y="4334256"/>
+              <a:t>[民] 深圳市腾讯计算机系统有限公司</a:t>
+            </a:r>
+          </a:p>
+        </p:txBody>
+      </p:sp>
+      <p:sp>
+        <p:nvSpPr>
+          <p:cNvPr id="40" name="TextBox 39"/>
+          <p:cNvSpPr txBox="1"/>
+          <p:nvPr/>
+        </p:nvSpPr>
+        <p:spPr>
+          <a:xfrm>
+            <a:off x="4297680" y="4937760"/>
             <a:ext cx="3474720" cy="201168"/>
           </a:xfrm>
           <a:prstGeom prst="rect">
@@ -25117,20 +25922,20 @@
               </a:defRPr>
             </a:pPr>
             <a:r>
-              <a:t>[民] 深圳市腾讯计算机系统有限公司</a:t>
-            </a:r>
-          </a:p>
-        </p:txBody>
-      </p:sp>
-      <p:sp>
-        <p:nvSpPr>
-          <p:cNvPr id="38" name="TextBox 37"/>
-          <p:cNvSpPr txBox="1"/>
-          <p:nvPr/>
-        </p:nvSpPr>
-        <p:spPr>
-          <a:xfrm>
-            <a:off x="4297680" y="4535424"/>
+              <a:t>[民] 滴普科技股份有限公司</a:t>
+            </a:r>
+          </a:p>
+        </p:txBody>
+      </p:sp>
+      <p:sp>
+        <p:nvSpPr>
+          <p:cNvPr id="41" name="TextBox 40"/>
+          <p:cNvSpPr txBox="1"/>
+          <p:nvPr/>
+        </p:nvSpPr>
+        <p:spPr>
+          <a:xfrm>
+            <a:off x="4297680" y="5138928"/>
             <a:ext cx="3474720" cy="201168"/>
           </a:xfrm>
           <a:prstGeom prst="rect">
@@ -25152,41 +25957,6 @@
               </a:defRPr>
             </a:pPr>
             <a:r>
-              <a:t>[民] 滴普科技股份有限公司</a:t>
-            </a:r>
-          </a:p>
-        </p:txBody>
-      </p:sp>
-      <p:sp>
-        <p:nvSpPr>
-          <p:cNvPr id="39" name="TextBox 38"/>
-          <p:cNvSpPr txBox="1"/>
-          <p:nvPr/>
-        </p:nvSpPr>
-        <p:spPr>
-          <a:xfrm>
-            <a:off x="4297680" y="4736592"/>
-            <a:ext cx="3474720" cy="201168"/>
-          </a:xfrm>
-          <a:prstGeom prst="rect">
-            <a:avLst/>
-          </a:prstGeom>
-          <a:noFill/>
-        </p:spPr>
-        <p:txBody>
-          <a:bodyPr wrap="square">
-            <a:spAutoFit/>
-          </a:bodyPr>
-          <a:lstStyle/>
-          <a:p>
-            <a:pPr algn="l">
-              <a:defRPr sz="750" b="0">
-                <a:solidFill>
-                  <a:srgbClr val="0891B2"/>
-                </a:solidFill>
-              </a:defRPr>
-            </a:pPr>
-            <a:r>
               <a:t>[民] 视云融聚（广州）科技有限公司</a:t>
             </a:r>
           </a:p>
@@ -25194,7 +25964,7 @@
       </p:sp>
       <p:sp>
         <p:nvSpPr>
-          <p:cNvPr id="40" name="Rectangle 39"/>
+          <p:cNvPr id="42" name="Rectangle 41"/>
           <p:cNvSpPr/>
           <p:nvPr/>
         </p:nvSpPr>
@@ -25246,7 +26016,7 @@
       </p:sp>
       <p:sp>
         <p:nvSpPr>
-          <p:cNvPr id="41" name="TextBox 40"/>
+          <p:cNvPr id="43" name="TextBox 42"/>
           <p:cNvSpPr txBox="1"/>
           <p:nvPr/>
         </p:nvSpPr>
@@ -25281,7 +26051,7 @@
       </p:sp>
       <p:sp>
         <p:nvSpPr>
-          <p:cNvPr id="42" name="TextBox 41"/>
+          <p:cNvPr id="44" name="TextBox 43"/>
           <p:cNvSpPr txBox="1"/>
           <p:nvPr/>
         </p:nvSpPr>
@@ -25422,7 +26192,7 @@
               </a:defRPr>
             </a:pPr>
             <a:r>
-              <a:t>共 52 家企业/机构涉及此场景</a:t>
+              <a:t>共 64 家企业/机构涉及此场景</a:t>
             </a:r>
           </a:p>
         </p:txBody>
@@ -25474,7 +26244,7 @@
               </a:defRPr>
             </a:pPr>
             <a:r>
-              <a:t>🔧 上游技术（42家）</a:t>
+              <a:t>🔧 上游技术（50家）</a:t>
             </a:r>
           </a:p>
         </p:txBody>
@@ -26139,7 +26909,7 @@
               </a:defRPr>
             </a:pPr>
             <a:r>
-              <a:t>...及其他 24 家</a:t>
+              <a:t>...及其他 32 家</a:t>
             </a:r>
           </a:p>
         </p:txBody>
@@ -26191,7 +26961,7 @@
               </a:defRPr>
             </a:pPr>
             <a:r>
-              <a:t>⚙️ 中游集成（3家）</a:t>
+              <a:t>⚙️ 中游集成（6家）</a:t>
             </a:r>
           </a:p>
         </p:txBody>
@@ -26221,6 +26991,41 @@
             <a:pPr algn="l">
               <a:defRPr sz="750" b="0">
                 <a:solidFill>
+                  <a:srgbClr val="D97706"/>
+                </a:solidFill>
+              </a:defRPr>
+            </a:pPr>
+            <a:r>
+              <a:t>[国] 广州市城市规划勘测设计研究院有限公司</a:t>
+            </a:r>
+          </a:p>
+        </p:txBody>
+      </p:sp>
+      <p:sp>
+        <p:nvSpPr>
+          <p:cNvPr id="26" name="TextBox 25"/>
+          <p:cNvSpPr txBox="1"/>
+          <p:nvPr/>
+        </p:nvSpPr>
+        <p:spPr>
+          <a:xfrm>
+            <a:off x="4297680" y="2121408"/>
+            <a:ext cx="3474720" cy="201168"/>
+          </a:xfrm>
+          <a:prstGeom prst="rect">
+            <a:avLst/>
+          </a:prstGeom>
+          <a:noFill/>
+        </p:spPr>
+        <p:txBody>
+          <a:bodyPr wrap="square">
+            <a:spAutoFit/>
+          </a:bodyPr>
+          <a:lstStyle/>
+          <a:p>
+            <a:pPr algn="l">
+              <a:defRPr sz="750" b="0">
+                <a:solidFill>
                   <a:srgbClr val="0891B2"/>
                 </a:solidFill>
               </a:defRPr>
@@ -26233,13 +27038,13 @@
       </p:sp>
       <p:sp>
         <p:nvSpPr>
-          <p:cNvPr id="26" name="TextBox 25"/>
-          <p:cNvSpPr txBox="1"/>
-          <p:nvPr/>
-        </p:nvSpPr>
-        <p:spPr>
-          <a:xfrm>
-            <a:off x="4297680" y="2121408"/>
+          <p:cNvPr id="27" name="TextBox 26"/>
+          <p:cNvSpPr txBox="1"/>
+          <p:nvPr/>
+        </p:nvSpPr>
+        <p:spPr>
+          <a:xfrm>
+            <a:off x="4297680" y="2322576"/>
             <a:ext cx="3474720" cy="201168"/>
           </a:xfrm>
           <a:prstGeom prst="rect">
@@ -26261,6 +27066,41 @@
               </a:defRPr>
             </a:pPr>
             <a:r>
+              <a:t>[民] 广州智臣信息科技有限公司</a:t>
+            </a:r>
+          </a:p>
+        </p:txBody>
+      </p:sp>
+      <p:sp>
+        <p:nvSpPr>
+          <p:cNvPr id="28" name="TextBox 27"/>
+          <p:cNvSpPr txBox="1"/>
+          <p:nvPr/>
+        </p:nvSpPr>
+        <p:spPr>
+          <a:xfrm>
+            <a:off x="4297680" y="2523744"/>
+            <a:ext cx="3474720" cy="201168"/>
+          </a:xfrm>
+          <a:prstGeom prst="rect">
+            <a:avLst/>
+          </a:prstGeom>
+          <a:noFill/>
+        </p:spPr>
+        <p:txBody>
+          <a:bodyPr wrap="square">
+            <a:spAutoFit/>
+          </a:bodyPr>
+          <a:lstStyle/>
+          <a:p>
+            <a:pPr algn="l">
+              <a:defRPr sz="750" b="0">
+                <a:solidFill>
+                  <a:srgbClr val="0891B2"/>
+                </a:solidFill>
+              </a:defRPr>
+            </a:pPr>
+            <a:r>
               <a:t>[民] 深圳市凌度汽车电子有限公司</a:t>
             </a:r>
           </a:p>
@@ -26268,13 +27108,48 @@
       </p:sp>
       <p:sp>
         <p:nvSpPr>
-          <p:cNvPr id="27" name="TextBox 26"/>
-          <p:cNvSpPr txBox="1"/>
-          <p:nvPr/>
-        </p:nvSpPr>
-        <p:spPr>
-          <a:xfrm>
-            <a:off x="4297680" y="2322576"/>
+          <p:cNvPr id="29" name="TextBox 28"/>
+          <p:cNvSpPr txBox="1"/>
+          <p:nvPr/>
+        </p:nvSpPr>
+        <p:spPr>
+          <a:xfrm>
+            <a:off x="4297680" y="2724912"/>
+            <a:ext cx="3474720" cy="201168"/>
+          </a:xfrm>
+          <a:prstGeom prst="rect">
+            <a:avLst/>
+          </a:prstGeom>
+          <a:noFill/>
+        </p:spPr>
+        <p:txBody>
+          <a:bodyPr wrap="square">
+            <a:spAutoFit/>
+          </a:bodyPr>
+          <a:lstStyle/>
+          <a:p>
+            <a:pPr algn="l">
+              <a:defRPr sz="750" b="0">
+                <a:solidFill>
+                  <a:srgbClr val="0891B2"/>
+                </a:solidFill>
+              </a:defRPr>
+            </a:pPr>
+            <a:r>
+              <a:t>[民] 视云融聚（广州）科技有限公司</a:t>
+            </a:r>
+          </a:p>
+        </p:txBody>
+      </p:sp>
+      <p:sp>
+        <p:nvSpPr>
+          <p:cNvPr id="30" name="TextBox 29"/>
+          <p:cNvSpPr txBox="1"/>
+          <p:nvPr/>
+        </p:nvSpPr>
+        <p:spPr>
+          <a:xfrm>
+            <a:off x="4297680" y="2926080"/>
             <a:ext cx="3474720" cy="201168"/>
           </a:xfrm>
           <a:prstGeom prst="rect">
@@ -26303,7 +27178,7 @@
       </p:sp>
       <p:sp>
         <p:nvSpPr>
-          <p:cNvPr id="28" name="Rectangle 27"/>
+          <p:cNvPr id="31" name="Rectangle 30"/>
           <p:cNvSpPr/>
           <p:nvPr/>
         </p:nvSpPr>
@@ -26348,14 +27223,14 @@
               </a:defRPr>
             </a:pPr>
             <a:r>
-              <a:t>📱 下游应用（7家）</a:t>
-            </a:r>
-          </a:p>
-        </p:txBody>
-      </p:sp>
-      <p:sp>
-        <p:nvSpPr>
-          <p:cNvPr id="29" name="TextBox 28"/>
+              <a:t>📱 下游应用（8家）</a:t>
+            </a:r>
+          </a:p>
+        </p:txBody>
+      </p:sp>
+      <p:sp>
+        <p:nvSpPr>
+          <p:cNvPr id="32" name="TextBox 31"/>
           <p:cNvSpPr txBox="1"/>
           <p:nvPr/>
         </p:nvSpPr>
@@ -26383,6 +27258,41 @@
               </a:defRPr>
             </a:pPr>
             <a:r>
+              <a:t>[国] 广州中交通信有限公司</a:t>
+            </a:r>
+          </a:p>
+        </p:txBody>
+      </p:sp>
+      <p:sp>
+        <p:nvSpPr>
+          <p:cNvPr id="33" name="TextBox 32"/>
+          <p:cNvSpPr txBox="1"/>
+          <p:nvPr/>
+        </p:nvSpPr>
+        <p:spPr>
+          <a:xfrm>
+            <a:off x="8138160" y="2121408"/>
+            <a:ext cx="3474720" cy="201168"/>
+          </a:xfrm>
+          <a:prstGeom prst="rect">
+            <a:avLst/>
+          </a:prstGeom>
+          <a:noFill/>
+        </p:spPr>
+        <p:txBody>
+          <a:bodyPr wrap="square">
+            <a:spAutoFit/>
+          </a:bodyPr>
+          <a:lstStyle/>
+          <a:p>
+            <a:pPr algn="l">
+              <a:defRPr sz="750" b="0">
+                <a:solidFill>
+                  <a:srgbClr val="D97706"/>
+                </a:solidFill>
+              </a:defRPr>
+            </a:pPr>
+            <a:r>
               <a:t>[国] 广州市智能网联汽车示范区运营中心</a:t>
             </a:r>
           </a:p>
@@ -26390,13 +27300,13 @@
       </p:sp>
       <p:sp>
         <p:nvSpPr>
-          <p:cNvPr id="30" name="TextBox 29"/>
-          <p:cNvSpPr txBox="1"/>
-          <p:nvPr/>
-        </p:nvSpPr>
-        <p:spPr>
-          <a:xfrm>
-            <a:off x="8138160" y="2121408"/>
+          <p:cNvPr id="34" name="TextBox 33"/>
+          <p:cNvSpPr txBox="1"/>
+          <p:nvPr/>
+        </p:nvSpPr>
+        <p:spPr>
+          <a:xfrm>
+            <a:off x="8138160" y="2322576"/>
             <a:ext cx="3474720" cy="201168"/>
           </a:xfrm>
           <a:prstGeom prst="rect">
@@ -26425,13 +27335,13 @@
       </p:sp>
       <p:sp>
         <p:nvSpPr>
-          <p:cNvPr id="31" name="TextBox 30"/>
-          <p:cNvSpPr txBox="1"/>
-          <p:nvPr/>
-        </p:nvSpPr>
-        <p:spPr>
-          <a:xfrm>
-            <a:off x="8138160" y="2322576"/>
+          <p:cNvPr id="35" name="TextBox 34"/>
+          <p:cNvSpPr txBox="1"/>
+          <p:nvPr/>
+        </p:nvSpPr>
+        <p:spPr>
+          <a:xfrm>
+            <a:off x="8138160" y="2523744"/>
             <a:ext cx="3474720" cy="201168"/>
           </a:xfrm>
           <a:prstGeom prst="rect">
@@ -26460,13 +27370,13 @@
       </p:sp>
       <p:sp>
         <p:nvSpPr>
-          <p:cNvPr id="32" name="TextBox 31"/>
-          <p:cNvSpPr txBox="1"/>
-          <p:nvPr/>
-        </p:nvSpPr>
-        <p:spPr>
-          <a:xfrm>
-            <a:off x="8138160" y="2523744"/>
+          <p:cNvPr id="36" name="TextBox 35"/>
+          <p:cNvSpPr txBox="1"/>
+          <p:nvPr/>
+        </p:nvSpPr>
+        <p:spPr>
+          <a:xfrm>
+            <a:off x="8138160" y="2724912"/>
             <a:ext cx="3474720" cy="201168"/>
           </a:xfrm>
           <a:prstGeom prst="rect">
@@ -26495,13 +27405,13 @@
       </p:sp>
       <p:sp>
         <p:nvSpPr>
-          <p:cNvPr id="33" name="TextBox 32"/>
-          <p:cNvSpPr txBox="1"/>
-          <p:nvPr/>
-        </p:nvSpPr>
-        <p:spPr>
-          <a:xfrm>
-            <a:off x="8138160" y="2724912"/>
+          <p:cNvPr id="37" name="TextBox 36"/>
+          <p:cNvSpPr txBox="1"/>
+          <p:nvPr/>
+        </p:nvSpPr>
+        <p:spPr>
+          <a:xfrm>
+            <a:off x="8138160" y="2926080"/>
             <a:ext cx="3474720" cy="201168"/>
           </a:xfrm>
           <a:prstGeom prst="rect">
@@ -26530,13 +27440,13 @@
       </p:sp>
       <p:sp>
         <p:nvSpPr>
-          <p:cNvPr id="34" name="TextBox 33"/>
-          <p:cNvSpPr txBox="1"/>
-          <p:nvPr/>
-        </p:nvSpPr>
-        <p:spPr>
-          <a:xfrm>
-            <a:off x="8138160" y="2926080"/>
+          <p:cNvPr id="38" name="TextBox 37"/>
+          <p:cNvSpPr txBox="1"/>
+          <p:nvPr/>
+        </p:nvSpPr>
+        <p:spPr>
+          <a:xfrm>
+            <a:off x="8138160" y="3127248"/>
             <a:ext cx="3474720" cy="201168"/>
           </a:xfrm>
           <a:prstGeom prst="rect">
@@ -26565,13 +27475,13 @@
       </p:sp>
       <p:sp>
         <p:nvSpPr>
-          <p:cNvPr id="35" name="TextBox 34"/>
-          <p:cNvSpPr txBox="1"/>
-          <p:nvPr/>
-        </p:nvSpPr>
-        <p:spPr>
-          <a:xfrm>
-            <a:off x="8138160" y="3127248"/>
+          <p:cNvPr id="39" name="TextBox 38"/>
+          <p:cNvSpPr txBox="1"/>
+          <p:nvPr/>
+        </p:nvSpPr>
+        <p:spPr>
+          <a:xfrm>
+            <a:off x="8138160" y="3328416"/>
             <a:ext cx="3474720" cy="201168"/>
           </a:xfrm>
           <a:prstGeom prst="rect">
@@ -26706,7 +27616,7 @@
               </a:defRPr>
             </a:pPr>
             <a:r>
-              <a:t>共 52 家企业/机构涉及此场景</a:t>
+              <a:t>共 67 家企业/机构涉及此场景</a:t>
             </a:r>
           </a:p>
         </p:txBody>
@@ -26758,7 +27668,7 @@
               </a:defRPr>
             </a:pPr>
             <a:r>
-              <a:t>🔧 上游技术（2家）</a:t>
+              <a:t>🔧 上游技术（7家）</a:t>
             </a:r>
           </a:p>
         </p:txBody>
@@ -26793,6 +27703,41 @@
               </a:defRPr>
             </a:pPr>
             <a:r>
+              <a:t>[国] 广东联合电子服务股份有限公司</a:t>
+            </a:r>
+          </a:p>
+        </p:txBody>
+      </p:sp>
+      <p:sp>
+        <p:nvSpPr>
+          <p:cNvPr id="6" name="TextBox 5"/>
+          <p:cNvSpPr txBox="1"/>
+          <p:nvPr/>
+        </p:nvSpPr>
+        <p:spPr>
+          <a:xfrm>
+            <a:off x="457200" y="2121408"/>
+            <a:ext cx="3474720" cy="201168"/>
+          </a:xfrm>
+          <a:prstGeom prst="rect">
+            <a:avLst/>
+          </a:prstGeom>
+          <a:noFill/>
+        </p:spPr>
+        <p:txBody>
+          <a:bodyPr wrap="square">
+            <a:spAutoFit/>
+          </a:bodyPr>
+          <a:lstStyle/>
+          <a:p>
+            <a:pPr algn="l">
+              <a:defRPr sz="750" b="0">
+                <a:solidFill>
+                  <a:srgbClr val="D97706"/>
+                </a:solidFill>
+              </a:defRPr>
+            </a:pPr>
+            <a:r>
               <a:t>[国] 广州交信投科技股份有限公司</a:t>
             </a:r>
           </a:p>
@@ -26800,13 +27745,13 @@
       </p:sp>
       <p:sp>
         <p:nvSpPr>
-          <p:cNvPr id="6" name="TextBox 5"/>
-          <p:cNvSpPr txBox="1"/>
-          <p:nvPr/>
-        </p:nvSpPr>
-        <p:spPr>
-          <a:xfrm>
-            <a:off x="457200" y="2121408"/>
+          <p:cNvPr id="7" name="TextBox 6"/>
+          <p:cNvSpPr txBox="1"/>
+          <p:nvPr/>
+        </p:nvSpPr>
+        <p:spPr>
+          <a:xfrm>
+            <a:off x="457200" y="2322576"/>
             <a:ext cx="3474720" cy="201168"/>
           </a:xfrm>
           <a:prstGeom prst="rect">
@@ -26828,6 +27773,41 @@
               </a:defRPr>
             </a:pPr>
             <a:r>
+              <a:t>[民] 佳都科技集团股份有限公司</a:t>
+            </a:r>
+          </a:p>
+        </p:txBody>
+      </p:sp>
+      <p:sp>
+        <p:nvSpPr>
+          <p:cNvPr id="8" name="TextBox 7"/>
+          <p:cNvSpPr txBox="1"/>
+          <p:nvPr/>
+        </p:nvSpPr>
+        <p:spPr>
+          <a:xfrm>
+            <a:off x="457200" y="2523744"/>
+            <a:ext cx="3474720" cy="201168"/>
+          </a:xfrm>
+          <a:prstGeom prst="rect">
+            <a:avLst/>
+          </a:prstGeom>
+          <a:noFill/>
+        </p:spPr>
+        <p:txBody>
+          <a:bodyPr wrap="square">
+            <a:spAutoFit/>
+          </a:bodyPr>
+          <a:lstStyle/>
+          <a:p>
+            <a:pPr algn="l">
+              <a:defRPr sz="750" b="0">
+                <a:solidFill>
+                  <a:srgbClr val="0891B2"/>
+                </a:solidFill>
+              </a:defRPr>
+            </a:pPr>
+            <a:r>
               <a:t>[民] 广州通达汽车电气股份有限公司</a:t>
             </a:r>
           </a:p>
@@ -26835,7 +27815,112 @@
       </p:sp>
       <p:sp>
         <p:nvSpPr>
-          <p:cNvPr id="7" name="Rectangle 6"/>
+          <p:cNvPr id="9" name="TextBox 8"/>
+          <p:cNvSpPr txBox="1"/>
+          <p:nvPr/>
+        </p:nvSpPr>
+        <p:spPr>
+          <a:xfrm>
+            <a:off x="457200" y="2724912"/>
+            <a:ext cx="3474720" cy="201168"/>
+          </a:xfrm>
+          <a:prstGeom prst="rect">
+            <a:avLst/>
+          </a:prstGeom>
+          <a:noFill/>
+        </p:spPr>
+        <p:txBody>
+          <a:bodyPr wrap="square">
+            <a:spAutoFit/>
+          </a:bodyPr>
+          <a:lstStyle/>
+          <a:p>
+            <a:pPr algn="l">
+              <a:defRPr sz="750" b="0">
+                <a:solidFill>
+                  <a:srgbClr val="0891B2"/>
+                </a:solidFill>
+              </a:defRPr>
+            </a:pPr>
+            <a:r>
+              <a:t>[民] 深圳北斗应用技术研究院有限公司</a:t>
+            </a:r>
+          </a:p>
+        </p:txBody>
+      </p:sp>
+      <p:sp>
+        <p:nvSpPr>
+          <p:cNvPr id="10" name="TextBox 9"/>
+          <p:cNvSpPr txBox="1"/>
+          <p:nvPr/>
+        </p:nvSpPr>
+        <p:spPr>
+          <a:xfrm>
+            <a:off x="457200" y="2926080"/>
+            <a:ext cx="3474720" cy="201168"/>
+          </a:xfrm>
+          <a:prstGeom prst="rect">
+            <a:avLst/>
+          </a:prstGeom>
+          <a:noFill/>
+        </p:spPr>
+        <p:txBody>
+          <a:bodyPr wrap="square">
+            <a:spAutoFit/>
+          </a:bodyPr>
+          <a:lstStyle/>
+          <a:p>
+            <a:pPr algn="l">
+              <a:defRPr sz="750" b="0">
+                <a:solidFill>
+                  <a:srgbClr val="0891B2"/>
+                </a:solidFill>
+              </a:defRPr>
+            </a:pPr>
+            <a:r>
+              <a:t>[民] 深圳市图敏智能视频股份有限公司</a:t>
+            </a:r>
+          </a:p>
+        </p:txBody>
+      </p:sp>
+      <p:sp>
+        <p:nvSpPr>
+          <p:cNvPr id="11" name="TextBox 10"/>
+          <p:cNvSpPr txBox="1"/>
+          <p:nvPr/>
+        </p:nvSpPr>
+        <p:spPr>
+          <a:xfrm>
+            <a:off x="457200" y="3127248"/>
+            <a:ext cx="3474720" cy="201168"/>
+          </a:xfrm>
+          <a:prstGeom prst="rect">
+            <a:avLst/>
+          </a:prstGeom>
+          <a:noFill/>
+        </p:spPr>
+        <p:txBody>
+          <a:bodyPr wrap="square">
+            <a:spAutoFit/>
+          </a:bodyPr>
+          <a:lstStyle/>
+          <a:p>
+            <a:pPr algn="l">
+              <a:defRPr sz="750" b="0">
+                <a:solidFill>
+                  <a:srgbClr val="0891B2"/>
+                </a:solidFill>
+              </a:defRPr>
+            </a:pPr>
+            <a:r>
+              <a:t>[民] 高新兴科技集团股份有限公司</a:t>
+            </a:r>
+          </a:p>
+        </p:txBody>
+      </p:sp>
+      <p:sp>
+        <p:nvSpPr>
+          <p:cNvPr id="12" name="Rectangle 11"/>
           <p:cNvSpPr/>
           <p:nvPr/>
         </p:nvSpPr>
@@ -26880,14 +27965,14 @@
               </a:defRPr>
             </a:pPr>
             <a:r>
-              <a:t>⚙️ 中游集成（16家）</a:t>
-            </a:r>
-          </a:p>
-        </p:txBody>
-      </p:sp>
-      <p:sp>
-        <p:nvSpPr>
-          <p:cNvPr id="8" name="TextBox 7"/>
+              <a:t>⚙️ 中游集成（23家）</a:t>
+            </a:r>
+          </a:p>
+        </p:txBody>
+      </p:sp>
+      <p:sp>
+        <p:nvSpPr>
+          <p:cNvPr id="13" name="TextBox 12"/>
           <p:cNvSpPr txBox="1"/>
           <p:nvPr/>
         </p:nvSpPr>
@@ -26922,7 +28007,7 @@
       </p:sp>
       <p:sp>
         <p:nvSpPr>
-          <p:cNvPr id="9" name="TextBox 8"/>
+          <p:cNvPr id="14" name="TextBox 13"/>
           <p:cNvSpPr txBox="1"/>
           <p:nvPr/>
         </p:nvSpPr>
@@ -26957,7 +28042,7 @@
       </p:sp>
       <p:sp>
         <p:nvSpPr>
-          <p:cNvPr id="10" name="TextBox 9"/>
+          <p:cNvPr id="15" name="TextBox 14"/>
           <p:cNvSpPr txBox="1"/>
           <p:nvPr/>
         </p:nvSpPr>
@@ -26992,7 +28077,7 @@
       </p:sp>
       <p:sp>
         <p:nvSpPr>
-          <p:cNvPr id="11" name="TextBox 10"/>
+          <p:cNvPr id="16" name="TextBox 15"/>
           <p:cNvSpPr txBox="1"/>
           <p:nvPr/>
         </p:nvSpPr>
@@ -27027,7 +28112,7 @@
       </p:sp>
       <p:sp>
         <p:nvSpPr>
-          <p:cNvPr id="12" name="TextBox 11"/>
+          <p:cNvPr id="17" name="TextBox 16"/>
           <p:cNvSpPr txBox="1"/>
           <p:nvPr/>
         </p:nvSpPr>
@@ -27062,7 +28147,7 @@
       </p:sp>
       <p:sp>
         <p:nvSpPr>
-          <p:cNvPr id="13" name="TextBox 12"/>
+          <p:cNvPr id="18" name="TextBox 17"/>
           <p:cNvSpPr txBox="1"/>
           <p:nvPr/>
         </p:nvSpPr>
@@ -27097,7 +28182,7 @@
       </p:sp>
       <p:sp>
         <p:nvSpPr>
-          <p:cNvPr id="14" name="TextBox 13"/>
+          <p:cNvPr id="19" name="TextBox 18"/>
           <p:cNvSpPr txBox="1"/>
           <p:nvPr/>
         </p:nvSpPr>
@@ -27132,7 +28217,7 @@
       </p:sp>
       <p:sp>
         <p:nvSpPr>
-          <p:cNvPr id="15" name="TextBox 14"/>
+          <p:cNvPr id="20" name="TextBox 19"/>
           <p:cNvSpPr txBox="1"/>
           <p:nvPr/>
         </p:nvSpPr>
@@ -27160,6 +28245,41 @@
               </a:defRPr>
             </a:pPr>
             <a:r>
+              <a:t>[国] 广州广电运通智能科技有限公司</a:t>
+            </a:r>
+          </a:p>
+        </p:txBody>
+      </p:sp>
+      <p:sp>
+        <p:nvSpPr>
+          <p:cNvPr id="21" name="TextBox 20"/>
+          <p:cNvSpPr txBox="1"/>
+          <p:nvPr/>
+        </p:nvSpPr>
+        <p:spPr>
+          <a:xfrm>
+            <a:off x="4297680" y="3529584"/>
+            <a:ext cx="3474720" cy="201168"/>
+          </a:xfrm>
+          <a:prstGeom prst="rect">
+            <a:avLst/>
+          </a:prstGeom>
+          <a:noFill/>
+        </p:spPr>
+        <p:txBody>
+          <a:bodyPr wrap="square">
+            <a:spAutoFit/>
+          </a:bodyPr>
+          <a:lstStyle/>
+          <a:p>
+            <a:pPr algn="l">
+              <a:defRPr sz="750" b="0">
+                <a:solidFill>
+                  <a:srgbClr val="D97706"/>
+                </a:solidFill>
+              </a:defRPr>
+            </a:pPr>
+            <a:r>
               <a:t>[国] 广州羊城通有限公司</a:t>
             </a:r>
           </a:p>
@@ -27167,13 +28287,13 @@
       </p:sp>
       <p:sp>
         <p:nvSpPr>
-          <p:cNvPr id="16" name="TextBox 15"/>
-          <p:cNvSpPr txBox="1"/>
-          <p:nvPr/>
-        </p:nvSpPr>
-        <p:spPr>
-          <a:xfrm>
-            <a:off x="4297680" y="3529584"/>
+          <p:cNvPr id="22" name="TextBox 21"/>
+          <p:cNvSpPr txBox="1"/>
+          <p:nvPr/>
+        </p:nvSpPr>
+        <p:spPr>
+          <a:xfrm>
+            <a:off x="4297680" y="3730752"/>
             <a:ext cx="3474720" cy="201168"/>
           </a:xfrm>
           <a:prstGeom prst="rect">
@@ -27195,6 +28315,41 @@
               </a:defRPr>
             </a:pPr>
             <a:r>
+              <a:t>[国] 广州运通链达金服科技有限公司</a:t>
+            </a:r>
+          </a:p>
+        </p:txBody>
+      </p:sp>
+      <p:sp>
+        <p:nvSpPr>
+          <p:cNvPr id="23" name="TextBox 22"/>
+          <p:cNvSpPr txBox="1"/>
+          <p:nvPr/>
+        </p:nvSpPr>
+        <p:spPr>
+          <a:xfrm>
+            <a:off x="4297680" y="3931920"/>
+            <a:ext cx="3474720" cy="201168"/>
+          </a:xfrm>
+          <a:prstGeom prst="rect">
+            <a:avLst/>
+          </a:prstGeom>
+          <a:noFill/>
+        </p:spPr>
+        <p:txBody>
+          <a:bodyPr wrap="square">
+            <a:spAutoFit/>
+          </a:bodyPr>
+          <a:lstStyle/>
+          <a:p>
+            <a:pPr algn="l">
+              <a:defRPr sz="750" b="0">
+                <a:solidFill>
+                  <a:srgbClr val="D97706"/>
+                </a:solidFill>
+              </a:defRPr>
+            </a:pPr>
+            <a:r>
               <a:t>[国] 深圳市城市交通规划设计研究中心股份有限公司</a:t>
             </a:r>
           </a:p>
@@ -27202,13 +28357,13 @@
       </p:sp>
       <p:sp>
         <p:nvSpPr>
-          <p:cNvPr id="17" name="TextBox 16"/>
-          <p:cNvSpPr txBox="1"/>
-          <p:nvPr/>
-        </p:nvSpPr>
-        <p:spPr>
-          <a:xfrm>
-            <a:off x="4297680" y="3730752"/>
+          <p:cNvPr id="24" name="TextBox 23"/>
+          <p:cNvSpPr txBox="1"/>
+          <p:nvPr/>
+        </p:nvSpPr>
+        <p:spPr>
+          <a:xfrm>
+            <a:off x="4297680" y="4133088"/>
             <a:ext cx="3474720" cy="201168"/>
           </a:xfrm>
           <a:prstGeom prst="rect">
@@ -27237,13 +28392,13 @@
       </p:sp>
       <p:sp>
         <p:nvSpPr>
-          <p:cNvPr id="18" name="TextBox 17"/>
-          <p:cNvSpPr txBox="1"/>
-          <p:nvPr/>
-        </p:nvSpPr>
-        <p:spPr>
-          <a:xfrm>
-            <a:off x="4297680" y="3931920"/>
+          <p:cNvPr id="25" name="TextBox 24"/>
+          <p:cNvSpPr txBox="1"/>
+          <p:nvPr/>
+        </p:nvSpPr>
+        <p:spPr>
+          <a:xfrm>
+            <a:off x="4297680" y="4334256"/>
             <a:ext cx="3474720" cy="201168"/>
           </a:xfrm>
           <a:prstGeom prst="rect">
@@ -27265,20 +28420,20 @@
               </a:defRPr>
             </a:pPr>
             <a:r>
-              <a:t>[民] 广州广电运通智能科技有限公司</a:t>
-            </a:r>
-          </a:p>
-        </p:txBody>
-      </p:sp>
-      <p:sp>
-        <p:nvSpPr>
-          <p:cNvPr id="19" name="TextBox 18"/>
-          <p:cNvSpPr txBox="1"/>
-          <p:nvPr/>
-        </p:nvSpPr>
-        <p:spPr>
-          <a:xfrm>
-            <a:off x="4297680" y="4133088"/>
+              <a:t>[民] 广东振业优控科技股份有限公司</a:t>
+            </a:r>
+          </a:p>
+        </p:txBody>
+      </p:sp>
+      <p:sp>
+        <p:nvSpPr>
+          <p:cNvPr id="26" name="TextBox 25"/>
+          <p:cNvSpPr txBox="1"/>
+          <p:nvPr/>
+        </p:nvSpPr>
+        <p:spPr>
+          <a:xfrm>
+            <a:off x="4297680" y="4535424"/>
             <a:ext cx="3474720" cy="201168"/>
           </a:xfrm>
           <a:prstGeom prst="rect">
@@ -27300,20 +28455,20 @@
               </a:defRPr>
             </a:pPr>
             <a:r>
-              <a:t>[民] 广州运通链达金服科技有限公司</a:t>
-            </a:r>
-          </a:p>
-        </p:txBody>
-      </p:sp>
-      <p:sp>
-        <p:nvSpPr>
-          <p:cNvPr id="20" name="TextBox 19"/>
-          <p:cNvSpPr txBox="1"/>
-          <p:nvPr/>
-        </p:nvSpPr>
-        <p:spPr>
-          <a:xfrm>
-            <a:off x="4297680" y="4334256"/>
+              <a:t>[民] 广东诺丰市政工程设计有限公司</a:t>
+            </a:r>
+          </a:p>
+        </p:txBody>
+      </p:sp>
+      <p:sp>
+        <p:nvSpPr>
+          <p:cNvPr id="27" name="TextBox 26"/>
+          <p:cNvSpPr txBox="1"/>
+          <p:nvPr/>
+        </p:nvSpPr>
+        <p:spPr>
+          <a:xfrm>
+            <a:off x="4297680" y="4736592"/>
             <a:ext cx="3474720" cy="201168"/>
           </a:xfrm>
           <a:prstGeom prst="rect">
@@ -27335,20 +28490,20 @@
               </a:defRPr>
             </a:pPr>
             <a:r>
-              <a:t>[民] 深圳市前海亿车科技有限公司</a:t>
-            </a:r>
-          </a:p>
-        </p:txBody>
-      </p:sp>
-      <p:sp>
-        <p:nvSpPr>
-          <p:cNvPr id="21" name="TextBox 20"/>
-          <p:cNvSpPr txBox="1"/>
-          <p:nvPr/>
-        </p:nvSpPr>
-        <p:spPr>
-          <a:xfrm>
-            <a:off x="4297680" y="4535424"/>
+              <a:t>[民] 广州市迈得科技有限公司</a:t>
+            </a:r>
+          </a:p>
+        </p:txBody>
+      </p:sp>
+      <p:sp>
+        <p:nvSpPr>
+          <p:cNvPr id="28" name="TextBox 27"/>
+          <p:cNvSpPr txBox="1"/>
+          <p:nvPr/>
+        </p:nvSpPr>
+        <p:spPr>
+          <a:xfrm>
+            <a:off x="4297680" y="4937760"/>
             <a:ext cx="3474720" cy="201168"/>
           </a:xfrm>
           <a:prstGeom prst="rect">
@@ -27370,20 +28525,20 @@
               </a:defRPr>
             </a:pPr>
             <a:r>
-              <a:t>[民] 深圳市腾讯计算机系统有限公司</a:t>
-            </a:r>
-          </a:p>
-        </p:txBody>
-      </p:sp>
-      <p:sp>
-        <p:nvSpPr>
-          <p:cNvPr id="22" name="TextBox 21"/>
-          <p:cNvSpPr txBox="1"/>
-          <p:nvPr/>
-        </p:nvSpPr>
-        <p:spPr>
-          <a:xfrm>
-            <a:off x="4297680" y="4736592"/>
+              <a:t>[民] 广州智臣信息科技有限公司</a:t>
+            </a:r>
+          </a:p>
+        </p:txBody>
+      </p:sp>
+      <p:sp>
+        <p:nvSpPr>
+          <p:cNvPr id="29" name="TextBox 28"/>
+          <p:cNvSpPr txBox="1"/>
+          <p:nvPr/>
+        </p:nvSpPr>
+        <p:spPr>
+          <a:xfrm>
+            <a:off x="4297680" y="5138928"/>
             <a:ext cx="3474720" cy="201168"/>
           </a:xfrm>
           <a:prstGeom prst="rect">
@@ -27405,20 +28560,20 @@
               </a:defRPr>
             </a:pPr>
             <a:r>
-              <a:t>[民] 深圳市都市交通规划设计研究院有限公司</a:t>
-            </a:r>
-          </a:p>
-        </p:txBody>
-      </p:sp>
-      <p:sp>
-        <p:nvSpPr>
-          <p:cNvPr id="23" name="TextBox 22"/>
-          <p:cNvSpPr txBox="1"/>
-          <p:nvPr/>
-        </p:nvSpPr>
-        <p:spPr>
-          <a:xfrm>
-            <a:off x="4297680" y="4937760"/>
+              <a:t>[民] 广州蔚景科技有限公司</a:t>
+            </a:r>
+          </a:p>
+        </p:txBody>
+      </p:sp>
+      <p:sp>
+        <p:nvSpPr>
+          <p:cNvPr id="30" name="TextBox 29"/>
+          <p:cNvSpPr txBox="1"/>
+          <p:nvPr/>
+        </p:nvSpPr>
+        <p:spPr>
+          <a:xfrm>
+            <a:off x="4297680" y="5340096"/>
             <a:ext cx="3474720" cy="201168"/>
           </a:xfrm>
           <a:prstGeom prst="rect">
@@ -27440,14 +28595,49 @@
               </a:defRPr>
             </a:pPr>
             <a:r>
-              <a:t>[民] 深圳市金证科技股份有限公司</a:t>
-            </a:r>
-          </a:p>
-        </p:txBody>
-      </p:sp>
-      <p:sp>
-        <p:nvSpPr>
-          <p:cNvPr id="24" name="Rectangle 23"/>
+              <a:t>[民] 广州运星科技有限公司</a:t>
+            </a:r>
+          </a:p>
+        </p:txBody>
+      </p:sp>
+      <p:sp>
+        <p:nvSpPr>
+          <p:cNvPr id="31" name="TextBox 30"/>
+          <p:cNvSpPr txBox="1"/>
+          <p:nvPr/>
+        </p:nvSpPr>
+        <p:spPr>
+          <a:xfrm>
+            <a:off x="4297680" y="5541264"/>
+            <a:ext cx="3474720" cy="182880"/>
+          </a:xfrm>
+          <a:prstGeom prst="rect">
+            <a:avLst/>
+          </a:prstGeom>
+          <a:noFill/>
+        </p:spPr>
+        <p:txBody>
+          <a:bodyPr wrap="square">
+            <a:spAutoFit/>
+          </a:bodyPr>
+          <a:lstStyle/>
+          <a:p>
+            <a:pPr algn="l">
+              <a:defRPr sz="700" b="0">
+                <a:solidFill>
+                  <a:srgbClr val="94A3B8"/>
+                </a:solidFill>
+              </a:defRPr>
+            </a:pPr>
+            <a:r>
+              <a:t>...及其他 5 家</a:t>
+            </a:r>
+          </a:p>
+        </p:txBody>
+      </p:sp>
+      <p:sp>
+        <p:nvSpPr>
+          <p:cNvPr id="32" name="Rectangle 31"/>
           <p:cNvSpPr/>
           <p:nvPr/>
         </p:nvSpPr>
@@ -27492,14 +28682,14 @@
               </a:defRPr>
             </a:pPr>
             <a:r>
-              <a:t>📱 下游应用（34家）</a:t>
-            </a:r>
-          </a:p>
-        </p:txBody>
-      </p:sp>
-      <p:sp>
-        <p:nvSpPr>
-          <p:cNvPr id="25" name="TextBox 24"/>
+              <a:t>📱 下游应用（37家）</a:t>
+            </a:r>
+          </a:p>
+        </p:txBody>
+      </p:sp>
+      <p:sp>
+        <p:nvSpPr>
+          <p:cNvPr id="33" name="TextBox 32"/>
           <p:cNvSpPr txBox="1"/>
           <p:nvPr/>
         </p:nvSpPr>
@@ -27534,7 +28724,7 @@
       </p:sp>
       <p:sp>
         <p:nvSpPr>
-          <p:cNvPr id="26" name="TextBox 25"/>
+          <p:cNvPr id="34" name="TextBox 33"/>
           <p:cNvSpPr txBox="1"/>
           <p:nvPr/>
         </p:nvSpPr>
@@ -27569,7 +28759,7 @@
       </p:sp>
       <p:sp>
         <p:nvSpPr>
-          <p:cNvPr id="27" name="TextBox 26"/>
+          <p:cNvPr id="35" name="TextBox 34"/>
           <p:cNvSpPr txBox="1"/>
           <p:nvPr/>
         </p:nvSpPr>
@@ -27604,7 +28794,7 @@
       </p:sp>
       <p:sp>
         <p:nvSpPr>
-          <p:cNvPr id="28" name="TextBox 27"/>
+          <p:cNvPr id="36" name="TextBox 35"/>
           <p:cNvSpPr txBox="1"/>
           <p:nvPr/>
         </p:nvSpPr>
@@ -27639,7 +28829,7 @@
       </p:sp>
       <p:sp>
         <p:nvSpPr>
-          <p:cNvPr id="29" name="TextBox 28"/>
+          <p:cNvPr id="37" name="TextBox 36"/>
           <p:cNvSpPr txBox="1"/>
           <p:nvPr/>
         </p:nvSpPr>
@@ -27674,7 +28864,7 @@
       </p:sp>
       <p:sp>
         <p:nvSpPr>
-          <p:cNvPr id="30" name="TextBox 29"/>
+          <p:cNvPr id="38" name="TextBox 37"/>
           <p:cNvSpPr txBox="1"/>
           <p:nvPr/>
         </p:nvSpPr>
@@ -27709,7 +28899,7 @@
       </p:sp>
       <p:sp>
         <p:nvSpPr>
-          <p:cNvPr id="31" name="TextBox 30"/>
+          <p:cNvPr id="39" name="TextBox 38"/>
           <p:cNvSpPr txBox="1"/>
           <p:nvPr/>
         </p:nvSpPr>
@@ -27744,7 +28934,7 @@
       </p:sp>
       <p:sp>
         <p:nvSpPr>
-          <p:cNvPr id="32" name="TextBox 31"/>
+          <p:cNvPr id="40" name="TextBox 39"/>
           <p:cNvSpPr txBox="1"/>
           <p:nvPr/>
         </p:nvSpPr>
@@ -27772,6 +28962,41 @@
               </a:defRPr>
             </a:pPr>
             <a:r>
+              <a:t>[国] 广州中交通信有限公司</a:t>
+            </a:r>
+          </a:p>
+        </p:txBody>
+      </p:sp>
+      <p:sp>
+        <p:nvSpPr>
+          <p:cNvPr id="41" name="TextBox 40"/>
+          <p:cNvSpPr txBox="1"/>
+          <p:nvPr/>
+        </p:nvSpPr>
+        <p:spPr>
+          <a:xfrm>
+            <a:off x="8138160" y="3529584"/>
+            <a:ext cx="3474720" cy="201168"/>
+          </a:xfrm>
+          <a:prstGeom prst="rect">
+            <a:avLst/>
+          </a:prstGeom>
+          <a:noFill/>
+        </p:spPr>
+        <p:txBody>
+          <a:bodyPr wrap="square">
+            <a:spAutoFit/>
+          </a:bodyPr>
+          <a:lstStyle/>
+          <a:p>
+            <a:pPr algn="l">
+              <a:defRPr sz="750" b="0">
+                <a:solidFill>
+                  <a:srgbClr val="D97706"/>
+                </a:solidFill>
+              </a:defRPr>
+            </a:pPr>
+            <a:r>
               <a:t>[国] 广州公交集团新能源发展有限责任公司</a:t>
             </a:r>
           </a:p>
@@ -27779,13 +29004,13 @@
       </p:sp>
       <p:sp>
         <p:nvSpPr>
-          <p:cNvPr id="33" name="TextBox 32"/>
-          <p:cNvSpPr txBox="1"/>
-          <p:nvPr/>
-        </p:nvSpPr>
-        <p:spPr>
-          <a:xfrm>
-            <a:off x="8138160" y="3529584"/>
+          <p:cNvPr id="42" name="TextBox 41"/>
+          <p:cNvSpPr txBox="1"/>
+          <p:nvPr/>
+        </p:nvSpPr>
+        <p:spPr>
+          <a:xfrm>
+            <a:off x="8138160" y="3730752"/>
             <a:ext cx="3474720" cy="201168"/>
           </a:xfrm>
           <a:prstGeom prst="rect">
@@ -27814,13 +29039,13 @@
       </p:sp>
       <p:sp>
         <p:nvSpPr>
-          <p:cNvPr id="34" name="TextBox 33"/>
-          <p:cNvSpPr txBox="1"/>
-          <p:nvPr/>
-        </p:nvSpPr>
-        <p:spPr>
-          <a:xfrm>
-            <a:off x="8138160" y="3730752"/>
+          <p:cNvPr id="43" name="TextBox 42"/>
+          <p:cNvSpPr txBox="1"/>
+          <p:nvPr/>
+        </p:nvSpPr>
+        <p:spPr>
+          <a:xfrm>
+            <a:off x="8138160" y="3931920"/>
             <a:ext cx="3474720" cy="201168"/>
           </a:xfrm>
           <a:prstGeom prst="rect">
@@ -27849,13 +29074,13 @@
       </p:sp>
       <p:sp>
         <p:nvSpPr>
-          <p:cNvPr id="35" name="TextBox 34"/>
-          <p:cNvSpPr txBox="1"/>
-          <p:nvPr/>
-        </p:nvSpPr>
-        <p:spPr>
-          <a:xfrm>
-            <a:off x="8138160" y="3931920"/>
+          <p:cNvPr id="44" name="TextBox 43"/>
+          <p:cNvSpPr txBox="1"/>
+          <p:nvPr/>
+        </p:nvSpPr>
+        <p:spPr>
+          <a:xfrm>
+            <a:off x="8138160" y="4133088"/>
             <a:ext cx="3474720" cy="201168"/>
           </a:xfrm>
           <a:prstGeom prst="rect">
@@ -27884,13 +29109,13 @@
       </p:sp>
       <p:sp>
         <p:nvSpPr>
-          <p:cNvPr id="36" name="TextBox 35"/>
-          <p:cNvSpPr txBox="1"/>
-          <p:nvPr/>
-        </p:nvSpPr>
-        <p:spPr>
-          <a:xfrm>
-            <a:off x="8138160" y="4133088"/>
+          <p:cNvPr id="45" name="TextBox 44"/>
+          <p:cNvSpPr txBox="1"/>
+          <p:nvPr/>
+        </p:nvSpPr>
+        <p:spPr>
+          <a:xfrm>
+            <a:off x="8138160" y="4334256"/>
             <a:ext cx="3474720" cy="201168"/>
           </a:xfrm>
           <a:prstGeom prst="rect">
@@ -27919,13 +29144,13 @@
       </p:sp>
       <p:sp>
         <p:nvSpPr>
-          <p:cNvPr id="37" name="TextBox 36"/>
-          <p:cNvSpPr txBox="1"/>
-          <p:nvPr/>
-        </p:nvSpPr>
-        <p:spPr>
-          <a:xfrm>
-            <a:off x="8138160" y="4334256"/>
+          <p:cNvPr id="46" name="TextBox 45"/>
+          <p:cNvSpPr txBox="1"/>
+          <p:nvPr/>
+        </p:nvSpPr>
+        <p:spPr>
+          <a:xfrm>
+            <a:off x="8138160" y="4535424"/>
             <a:ext cx="3474720" cy="201168"/>
           </a:xfrm>
           <a:prstGeom prst="rect">
@@ -27954,13 +29179,13 @@
       </p:sp>
       <p:sp>
         <p:nvSpPr>
-          <p:cNvPr id="38" name="TextBox 37"/>
-          <p:cNvSpPr txBox="1"/>
-          <p:nvPr/>
-        </p:nvSpPr>
-        <p:spPr>
-          <a:xfrm>
-            <a:off x="8138160" y="4535424"/>
+          <p:cNvPr id="47" name="TextBox 46"/>
+          <p:cNvSpPr txBox="1"/>
+          <p:nvPr/>
+        </p:nvSpPr>
+        <p:spPr>
+          <a:xfrm>
+            <a:off x="8138160" y="4736592"/>
             <a:ext cx="3474720" cy="201168"/>
           </a:xfrm>
           <a:prstGeom prst="rect">
@@ -27989,13 +29214,13 @@
       </p:sp>
       <p:sp>
         <p:nvSpPr>
-          <p:cNvPr id="39" name="TextBox 38"/>
-          <p:cNvSpPr txBox="1"/>
-          <p:nvPr/>
-        </p:nvSpPr>
-        <p:spPr>
-          <a:xfrm>
-            <a:off x="8138160" y="4736592"/>
+          <p:cNvPr id="48" name="TextBox 47"/>
+          <p:cNvSpPr txBox="1"/>
+          <p:nvPr/>
+        </p:nvSpPr>
+        <p:spPr>
+          <a:xfrm>
+            <a:off x="8138160" y="4937760"/>
             <a:ext cx="3474720" cy="201168"/>
           </a:xfrm>
           <a:prstGeom prst="rect">
@@ -28024,13 +29249,13 @@
       </p:sp>
       <p:sp>
         <p:nvSpPr>
-          <p:cNvPr id="40" name="TextBox 39"/>
-          <p:cNvSpPr txBox="1"/>
-          <p:nvPr/>
-        </p:nvSpPr>
-        <p:spPr>
-          <a:xfrm>
-            <a:off x="8138160" y="4937760"/>
+          <p:cNvPr id="49" name="TextBox 48"/>
+          <p:cNvSpPr txBox="1"/>
+          <p:nvPr/>
+        </p:nvSpPr>
+        <p:spPr>
+          <a:xfrm>
+            <a:off x="8138160" y="5138928"/>
             <a:ext cx="3474720" cy="201168"/>
           </a:xfrm>
           <a:prstGeom prst="rect">
@@ -28059,13 +29284,13 @@
       </p:sp>
       <p:sp>
         <p:nvSpPr>
-          <p:cNvPr id="41" name="TextBox 40"/>
-          <p:cNvSpPr txBox="1"/>
-          <p:nvPr/>
-        </p:nvSpPr>
-        <p:spPr>
-          <a:xfrm>
-            <a:off x="8138160" y="5138928"/>
+          <p:cNvPr id="50" name="TextBox 49"/>
+          <p:cNvSpPr txBox="1"/>
+          <p:nvPr/>
+        </p:nvSpPr>
+        <p:spPr>
+          <a:xfrm>
+            <a:off x="8138160" y="5340096"/>
             <a:ext cx="3474720" cy="201168"/>
           </a:xfrm>
           <a:prstGeom prst="rect">
@@ -28094,42 +29319,7 @@
       </p:sp>
       <p:sp>
         <p:nvSpPr>
-          <p:cNvPr id="42" name="TextBox 41"/>
-          <p:cNvSpPr txBox="1"/>
-          <p:nvPr/>
-        </p:nvSpPr>
-        <p:spPr>
-          <a:xfrm>
-            <a:off x="8138160" y="5340096"/>
-            <a:ext cx="3474720" cy="201168"/>
-          </a:xfrm>
-          <a:prstGeom prst="rect">
-            <a:avLst/>
-          </a:prstGeom>
-          <a:noFill/>
-        </p:spPr>
-        <p:txBody>
-          <a:bodyPr wrap="square">
-            <a:spAutoFit/>
-          </a:bodyPr>
-          <a:lstStyle/>
-          <a:p>
-            <a:pPr algn="l">
-              <a:defRPr sz="750" b="0">
-                <a:solidFill>
-                  <a:srgbClr val="D97706"/>
-                </a:solidFill>
-              </a:defRPr>
-            </a:pPr>
-            <a:r>
-              <a:t>[国] 深圳市地铁集团有限公司</a:t>
-            </a:r>
-          </a:p>
-        </p:txBody>
-      </p:sp>
-      <p:sp>
-        <p:nvSpPr>
-          <p:cNvPr id="43" name="TextBox 42"/>
+          <p:cNvPr id="51" name="TextBox 50"/>
           <p:cNvSpPr txBox="1"/>
           <p:nvPr/>
         </p:nvSpPr>
@@ -28157,7 +29347,7 @@
               </a:defRPr>
             </a:pPr>
             <a:r>
-              <a:t>...及其他 16 家</a:t>
+              <a:t>...及其他 19 家</a:t>
             </a:r>
           </a:p>
         </p:txBody>
